--- a/cuhk-csc-1004/slides/CSC1004 Tutorial 7.pptx
+++ b/cuhk-csc-1004/slides/CSC1004 Tutorial 7.pptx
@@ -5,24 +5,23 @@
     <p:sldMasterId id="2147483648" r:id="rId1"/>
   </p:sldMasterIdLst>
   <p:notesMasterIdLst>
-    <p:notesMasterId r:id="rId12"/>
+    <p:notesMasterId r:id="rId11"/>
   </p:notesMasterIdLst>
   <p:sldIdLst>
     <p:sldId id="257" r:id="rId2"/>
-    <p:sldId id="334" r:id="rId3"/>
-    <p:sldId id="340" r:id="rId4"/>
-    <p:sldId id="358" r:id="rId5"/>
-    <p:sldId id="362" r:id="rId6"/>
-    <p:sldId id="346" r:id="rId7"/>
-    <p:sldId id="361" r:id="rId8"/>
-    <p:sldId id="360" r:id="rId9"/>
-    <p:sldId id="359" r:id="rId10"/>
-    <p:sldId id="262" r:id="rId11"/>
+    <p:sldId id="340" r:id="rId3"/>
+    <p:sldId id="358" r:id="rId4"/>
+    <p:sldId id="362" r:id="rId5"/>
+    <p:sldId id="346" r:id="rId6"/>
+    <p:sldId id="361" r:id="rId7"/>
+    <p:sldId id="360" r:id="rId8"/>
+    <p:sldId id="359" r:id="rId9"/>
+    <p:sldId id="262" r:id="rId10"/>
   </p:sldIdLst>
   <p:sldSz cx="12192000" cy="6858000"/>
   <p:notesSz cx="6858000" cy="9144000"/>
   <p:custDataLst>
-    <p:tags r:id="rId13"/>
+    <p:tags r:id="rId12"/>
   </p:custDataLst>
   <p:defaultTextStyle>
     <a:lvl1pPr marL="0" lvl="0" algn="l" defTabSz="914400">
@@ -203,7 +202,7 @@
           <a:p>
             <a:fld id="{78F13B20-8BB8-B74B-ADB5-DA5707988F1E}" type="datetimeFigureOut">
               <a:rPr lang="zh-CN" altLang="en-US"/>
-              <a:t>2025/4/1</a:t>
+              <a:t>2026/3/26</a:t>
             </a:fld>
             <a:endParaRPr kumimoji="1" lang="zh-CN" altLang="en-US"/>
           </a:p>
@@ -1474,185 +1473,19 @@
               <a:t>CSC1004 Tutorial 7</a:t>
             </a:r>
             <a:br>
-              <a:rPr lang="en-US" altLang="zh-CN" sz="3600">
+              <a:rPr lang="en-US" altLang="zh-CN" sz="3600" dirty="0">
                 <a:latin typeface="Calibri" panose="020F0502020204030204"/>
               </a:rPr>
             </a:br>
             <a:r>
-              <a:rPr lang="en-US" altLang="zh-CN" sz="2400">
+              <a:rPr lang="en-US" altLang="zh-CN" sz="2400" dirty="0">
                 <a:latin typeface="Calibri" panose="020F0502020204030204"/>
               </a:rPr>
-              <a:t>Yan KE</a:t>
+              <a:t>Ruixing Jin</a:t>
             </a:r>
             <a:endParaRPr lang="zh-CN" sz="3600" dirty="0">
               <a:latin typeface="Calibri" panose="020F0502020204030204"/>
             </a:endParaRPr>
-          </a:p>
-        </p:txBody>
-      </p:sp>
-    </p:spTree>
-  </p:cSld>
-  <p:clrMapOvr>
-    <a:masterClrMapping/>
-  </p:clrMapOvr>
-</p:sld>
-</file>
-
-<file path=ppt/slides/slide10.xml><?xml version="1.0" encoding="utf-8"?>
-<p:sld xmlns:a="http://schemas.openxmlformats.org/drawingml/2006/main" xmlns:r="http://schemas.openxmlformats.org/officeDocument/2006/relationships" xmlns:p="http://schemas.openxmlformats.org/presentationml/2006/main">
-  <p:cSld>
-    <p:spTree>
-      <p:nvGrpSpPr>
-        <p:cNvPr id="1" name=""/>
-        <p:cNvGrpSpPr/>
-        <p:nvPr/>
-      </p:nvGrpSpPr>
-      <p:grpSpPr>
-        <a:xfrm>
-          <a:off x="0" y="0"/>
-          <a:ext cx="0" cy="0"/>
-          <a:chOff x="0" y="0"/>
-          <a:chExt cx="0" cy="0"/>
-        </a:xfrm>
-      </p:grpSpPr>
-      <p:sp>
-        <p:nvSpPr>
-          <p:cNvPr id="1048583" name="Subtitle 14"/>
-          <p:cNvSpPr>
-            <a:spLocks noGrp="1"/>
-          </p:cNvSpPr>
-          <p:nvPr>
-            <p:ph idx="1"/>
-          </p:nvPr>
-        </p:nvSpPr>
-        <p:spPr/>
-        <p:txBody>
-          <a:bodyPr>
-            <a:normAutofit/>
-          </a:bodyPr>
-          <a:lstStyle/>
-          <a:p>
-            <a:r>
-              <a:rPr lang="zh-TW" sz="2800" b="1"/>
-              <a:t>林天麟 教授</a:t>
-            </a:r>
-            <a:endParaRPr lang="en-US" sz="2800" b="1"/>
-          </a:p>
-          <a:p>
-            <a:r>
-              <a:rPr lang="zh-CN"/>
-              <a:t>香港中文大学（深圳）</a:t>
-            </a:r>
-            <a:endParaRPr lang="en-US"/>
-          </a:p>
-          <a:p>
-            <a:r>
-              <a:rPr lang="zh-CN"/>
-              <a:t>机器人与</a:t>
-            </a:r>
-            <a:r>
-              <a:rPr lang="zh-TW"/>
-              <a:t>人工智能实验室</a:t>
-            </a:r>
-            <a:endParaRPr lang="en-US"/>
-          </a:p>
-          <a:p>
-            <a:r>
-              <a:rPr lang="en-US"/>
-              <a:t>WeChat: tinlunlam</a:t>
-            </a:r>
-            <a:endParaRPr lang="zh-CN"/>
-          </a:p>
-        </p:txBody>
-      </p:sp>
-      <p:sp>
-        <p:nvSpPr>
-          <p:cNvPr id="1048584" name="AutoShape 2"/>
-          <p:cNvSpPr>
-            <a:spLocks noChangeAspect="1" noChangeArrowheads="1"/>
-          </p:cNvSpPr>
-          <p:nvPr/>
-        </p:nvSpPr>
-        <p:spPr>
-          <a:xfrm>
-            <a:off x="155575" y="-144463"/>
-            <a:ext cx="304800" cy="304801"/>
-          </a:xfrm>
-          <a:prstGeom prst="rect">
-            <a:avLst/>
-          </a:prstGeom>
-          <a:noFill/>
-        </p:spPr>
-        <p:txBody>
-          <a:bodyPr vert="horz" wrap="square" lIns="91440" tIns="45720" rIns="91440" bIns="45720" numCol="1" anchor="t" anchorCtr="0"/>
-          <a:lstStyle/>
-          <a:p>
-            <a:endParaRPr lang="en-US"/>
-          </a:p>
-        </p:txBody>
-      </p:sp>
-      <p:pic>
-        <p:nvPicPr>
-          <p:cNvPr id="2097154" name="Picture 4"/>
-          <p:cNvPicPr>
-            <a:picLocks noChangeAspect="1" noChangeArrowheads="1"/>
-          </p:cNvPicPr>
-          <p:nvPr/>
-        </p:nvPicPr>
-        <p:blipFill>
-          <a:blip r:embed="rId2"/>
-          <a:stretch>
-            <a:fillRect/>
-          </a:stretch>
-        </p:blipFill>
-        <p:spPr>
-          <a:xfrm>
-            <a:off x="-1" y="0"/>
-            <a:ext cx="12344399" cy="6858000"/>
-          </a:xfrm>
-          <a:prstGeom prst="rect">
-            <a:avLst/>
-          </a:prstGeom>
-          <a:noFill/>
-        </p:spPr>
-      </p:pic>
-      <p:sp>
-        <p:nvSpPr>
-          <p:cNvPr id="1048585" name="Title 18"/>
-          <p:cNvSpPr>
-            <a:spLocks noGrp="1"/>
-          </p:cNvSpPr>
-          <p:nvPr>
-            <p:ph type="title"/>
-          </p:nvPr>
-        </p:nvSpPr>
-        <p:spPr>
-          <a:xfrm>
-            <a:off x="3552037" y="2894570"/>
-            <a:ext cx="5087926" cy="1783234"/>
-          </a:xfrm>
-        </p:spPr>
-        <p:txBody>
-          <a:bodyPr/>
-          <a:lstStyle/>
-          <a:p>
-            <a:pPr algn="ctr"/>
-            <a:r>
-              <a:rPr lang="en-US" sz="6000" dirty="0"/>
-              <a:t>T</a:t>
-            </a:r>
-            <a:r>
-              <a:rPr lang="en-US" sz="4800" dirty="0"/>
-              <a:t>HANK </a:t>
-            </a:r>
-            <a:r>
-              <a:rPr lang="en-US" sz="6000" dirty="0"/>
-              <a:t>Y</a:t>
-            </a:r>
-            <a:r>
-              <a:rPr lang="en-US" sz="4800" dirty="0"/>
-              <a:t>OU</a:t>
-            </a:r>
           </a:p>
         </p:txBody>
       </p:sp>
@@ -1665,2159 +1498,6 @@
 </file>
 
 <file path=ppt/slides/slide2.xml><?xml version="1.0" encoding="utf-8"?>
-<p:sld xmlns:a="http://schemas.openxmlformats.org/drawingml/2006/main" xmlns:r="http://schemas.openxmlformats.org/officeDocument/2006/relationships" xmlns:p="http://schemas.openxmlformats.org/presentationml/2006/main">
-  <p:cSld>
-    <p:spTree>
-      <p:nvGrpSpPr>
-        <p:cNvPr id="1" name=""/>
-        <p:cNvGrpSpPr/>
-        <p:nvPr/>
-      </p:nvGrpSpPr>
-      <p:grpSpPr>
-        <a:xfrm>
-          <a:off x="0" y="0"/>
-          <a:ext cx="0" cy="0"/>
-          <a:chOff x="0" y="0"/>
-          <a:chExt cx="0" cy="0"/>
-        </a:xfrm>
-      </p:grpSpPr>
-      <p:sp>
-        <p:nvSpPr>
-          <p:cNvPr id="1048589" name="标题 4"/>
-          <p:cNvSpPr>
-            <a:spLocks noGrp="1"/>
-          </p:cNvSpPr>
-          <p:nvPr>
-            <p:ph type="title"/>
-          </p:nvPr>
-        </p:nvSpPr>
-        <p:spPr>
-          <a:xfrm>
-            <a:off x="236484" y="68717"/>
-            <a:ext cx="7884064" cy="835874"/>
-          </a:xfrm>
-        </p:spPr>
-        <p:txBody>
-          <a:bodyPr>
-            <a:normAutofit/>
-          </a:bodyPr>
-          <a:lstStyle/>
-          <a:p>
-            <a:r>
-              <a:rPr lang="en-US" altLang="zh-CN" sz="4000" dirty="0" err="1"/>
-              <a:t>Gomoku</a:t>
-            </a:r>
-            <a:r>
-              <a:rPr lang="en-US" altLang="zh-CN" sz="4000" dirty="0"/>
-              <a:t> Game (Recall)</a:t>
-            </a:r>
-            <a:endParaRPr lang="zh-CN" sz="4000" dirty="0"/>
-          </a:p>
-        </p:txBody>
-      </p:sp>
-      <p:grpSp>
-        <p:nvGrpSpPr>
-          <p:cNvPr id="1048602" name="组合 1048601">
-            <a:extLst>
-              <a:ext uri="{FF2B5EF4-FFF2-40B4-BE49-F238E27FC236}">
-                <a16:creationId xmlns:a16="http://schemas.microsoft.com/office/drawing/2014/main" id="{0BD0CBFC-0487-8429-3399-9311E8B012D3}"/>
-              </a:ext>
-            </a:extLst>
-          </p:cNvPr>
-          <p:cNvGrpSpPr/>
-          <p:nvPr/>
-        </p:nvGrpSpPr>
-        <p:grpSpPr>
-          <a:xfrm>
-            <a:off x="3796364" y="1498552"/>
-            <a:ext cx="4731335" cy="4777835"/>
-            <a:chOff x="3796364" y="1498552"/>
-            <a:chExt cx="4731335" cy="4777835"/>
-          </a:xfrm>
-        </p:grpSpPr>
-        <p:grpSp>
-          <p:nvGrpSpPr>
-            <p:cNvPr id="5" name="组合 4">
-              <a:extLst>
-                <a:ext uri="{FF2B5EF4-FFF2-40B4-BE49-F238E27FC236}">
-                  <a16:creationId xmlns:a16="http://schemas.microsoft.com/office/drawing/2014/main" id="{C3243517-090B-9D1F-669B-453042AF7AF7}"/>
-                </a:ext>
-              </a:extLst>
-            </p:cNvPr>
-            <p:cNvGrpSpPr/>
-            <p:nvPr/>
-          </p:nvGrpSpPr>
-          <p:grpSpPr>
-            <a:xfrm>
-              <a:off x="3897566" y="1980335"/>
-              <a:ext cx="2409498" cy="1368152"/>
-              <a:chOff x="724328" y="2044266"/>
-              <a:chExt cx="2409498" cy="1368152"/>
-            </a:xfrm>
-          </p:grpSpPr>
-          <p:pic>
-            <p:nvPicPr>
-              <p:cNvPr id="3" name="图片 2">
-                <a:extLst>
-                  <a:ext uri="{FF2B5EF4-FFF2-40B4-BE49-F238E27FC236}">
-                    <a16:creationId xmlns:a16="http://schemas.microsoft.com/office/drawing/2014/main" id="{6957D903-A9CB-7601-8416-1AADA68FE914}"/>
-                  </a:ext>
-                </a:extLst>
-              </p:cNvPr>
-              <p:cNvPicPr>
-                <a:picLocks noChangeAspect="1"/>
-              </p:cNvPicPr>
-              <p:nvPr/>
-            </p:nvPicPr>
-            <p:blipFill>
-              <a:blip r:embed="rId2"/>
-              <a:stretch>
-                <a:fillRect/>
-              </a:stretch>
-            </p:blipFill>
-            <p:spPr>
-              <a:xfrm>
-                <a:off x="724328" y="2044266"/>
-                <a:ext cx="2409498" cy="1368152"/>
-              </a:xfrm>
-              <a:prstGeom prst="rect">
-                <a:avLst/>
-              </a:prstGeom>
-            </p:spPr>
-          </p:pic>
-          <p:sp>
-            <p:nvSpPr>
-              <p:cNvPr id="4" name="矩形 3">
-                <a:extLst>
-                  <a:ext uri="{FF2B5EF4-FFF2-40B4-BE49-F238E27FC236}">
-                    <a16:creationId xmlns:a16="http://schemas.microsoft.com/office/drawing/2014/main" id="{05CCEF06-40F9-94B7-E47F-804954737886}"/>
-                  </a:ext>
-                </a:extLst>
-              </p:cNvPr>
-              <p:cNvSpPr/>
-              <p:nvPr/>
-            </p:nvSpPr>
-            <p:spPr>
-              <a:xfrm>
-                <a:off x="1147194" y="2708920"/>
-                <a:ext cx="1728192" cy="340618"/>
-              </a:xfrm>
-              <a:prstGeom prst="rect">
-                <a:avLst/>
-              </a:prstGeom>
-              <a:noFill/>
-              <a:ln w="28575">
-                <a:solidFill>
-                  <a:srgbClr val="FF0000"/>
-                </a:solidFill>
-              </a:ln>
-            </p:spPr>
-            <p:style>
-              <a:lnRef idx="2">
-                <a:schemeClr val="accent1">
-                  <a:shade val="15000"/>
-                </a:schemeClr>
-              </a:lnRef>
-              <a:fillRef idx="1">
-                <a:schemeClr val="accent1"/>
-              </a:fillRef>
-              <a:effectRef idx="0">
-                <a:schemeClr val="accent1"/>
-              </a:effectRef>
-              <a:fontRef idx="minor">
-                <a:schemeClr val="lt1"/>
-              </a:fontRef>
-            </p:style>
-            <p:txBody>
-              <a:bodyPr rtlCol="0" anchor="ctr"/>
-              <a:lstStyle/>
-              <a:p>
-                <a:pPr algn="ctr"/>
-                <a:endParaRPr lang="zh-CN" altLang="en-US"/>
-              </a:p>
-            </p:txBody>
-          </p:sp>
-        </p:grpSp>
-        <p:grpSp>
-          <p:nvGrpSpPr>
-            <p:cNvPr id="9" name="组合 8">
-              <a:extLst>
-                <a:ext uri="{FF2B5EF4-FFF2-40B4-BE49-F238E27FC236}">
-                  <a16:creationId xmlns:a16="http://schemas.microsoft.com/office/drawing/2014/main" id="{EA49612E-8803-E77C-F2A4-DE7C71AFAEAC}"/>
-                </a:ext>
-              </a:extLst>
-            </p:cNvPr>
-            <p:cNvGrpSpPr/>
-            <p:nvPr/>
-          </p:nvGrpSpPr>
-          <p:grpSpPr>
-            <a:xfrm>
-              <a:off x="3796364" y="3708527"/>
-              <a:ext cx="2029528" cy="2016224"/>
-              <a:chOff x="719995" y="3501008"/>
-              <a:chExt cx="2029528" cy="2016224"/>
-            </a:xfrm>
-          </p:grpSpPr>
-          <p:pic>
-            <p:nvPicPr>
-              <p:cNvPr id="7" name="图片 6">
-                <a:extLst>
-                  <a:ext uri="{FF2B5EF4-FFF2-40B4-BE49-F238E27FC236}">
-                    <a16:creationId xmlns:a16="http://schemas.microsoft.com/office/drawing/2014/main" id="{CD3CE112-4200-537E-7C35-69798A8A38FD}"/>
-                  </a:ext>
-                </a:extLst>
-              </p:cNvPr>
-              <p:cNvPicPr>
-                <a:picLocks noChangeAspect="1"/>
-              </p:cNvPicPr>
-              <p:nvPr/>
-            </p:nvPicPr>
-            <p:blipFill>
-              <a:blip r:embed="rId3"/>
-              <a:stretch>
-                <a:fillRect/>
-              </a:stretch>
-            </p:blipFill>
-            <p:spPr>
-              <a:xfrm>
-                <a:off x="839416" y="3501008"/>
-                <a:ext cx="1910107" cy="2016224"/>
-              </a:xfrm>
-              <a:prstGeom prst="rect">
-                <a:avLst/>
-              </a:prstGeom>
-            </p:spPr>
-          </p:pic>
-          <p:sp>
-            <p:nvSpPr>
-              <p:cNvPr id="8" name="矩形 7">
-                <a:extLst>
-                  <a:ext uri="{FF2B5EF4-FFF2-40B4-BE49-F238E27FC236}">
-                    <a16:creationId xmlns:a16="http://schemas.microsoft.com/office/drawing/2014/main" id="{32F74AEA-65DC-EA03-C3A1-DDF38F105DB2}"/>
-                  </a:ext>
-                </a:extLst>
-              </p:cNvPr>
-              <p:cNvSpPr/>
-              <p:nvPr/>
-            </p:nvSpPr>
-            <p:spPr>
-              <a:xfrm rot="2641072">
-                <a:off x="719995" y="4449729"/>
-                <a:ext cx="1972671" cy="302168"/>
-              </a:xfrm>
-              <a:prstGeom prst="rect">
-                <a:avLst/>
-              </a:prstGeom>
-              <a:noFill/>
-              <a:ln w="28575">
-                <a:solidFill>
-                  <a:srgbClr val="FF0000"/>
-                </a:solidFill>
-              </a:ln>
-            </p:spPr>
-            <p:style>
-              <a:lnRef idx="2">
-                <a:schemeClr val="accent1">
-                  <a:shade val="15000"/>
-                </a:schemeClr>
-              </a:lnRef>
-              <a:fillRef idx="1">
-                <a:schemeClr val="accent1"/>
-              </a:fillRef>
-              <a:effectRef idx="0">
-                <a:schemeClr val="accent1"/>
-              </a:effectRef>
-              <a:fontRef idx="minor">
-                <a:schemeClr val="lt1"/>
-              </a:fontRef>
-            </p:style>
-            <p:txBody>
-              <a:bodyPr rtlCol="0" anchor="ctr"/>
-              <a:lstStyle/>
-              <a:p>
-                <a:pPr algn="ctr"/>
-                <a:endParaRPr lang="zh-CN" altLang="en-US"/>
-              </a:p>
-            </p:txBody>
-          </p:sp>
-        </p:grpSp>
-        <p:grpSp>
-          <p:nvGrpSpPr>
-            <p:cNvPr id="16" name="组合 15">
-              <a:extLst>
-                <a:ext uri="{FF2B5EF4-FFF2-40B4-BE49-F238E27FC236}">
-                  <a16:creationId xmlns:a16="http://schemas.microsoft.com/office/drawing/2014/main" id="{2870A378-5B52-DD8E-6C5D-A77C5FCB10D5}"/>
-                </a:ext>
-              </a:extLst>
-            </p:cNvPr>
-            <p:cNvGrpSpPr/>
-            <p:nvPr/>
-          </p:nvGrpSpPr>
-          <p:grpSpPr>
-            <a:xfrm>
-              <a:off x="6729930" y="1980335"/>
-              <a:ext cx="1355246" cy="2434304"/>
-              <a:chOff x="3719736" y="1858792"/>
-              <a:chExt cx="2009775" cy="3609975"/>
-            </a:xfrm>
-          </p:grpSpPr>
-          <p:pic>
-            <p:nvPicPr>
-              <p:cNvPr id="14" name="图片 13">
-                <a:extLst>
-                  <a:ext uri="{FF2B5EF4-FFF2-40B4-BE49-F238E27FC236}">
-                    <a16:creationId xmlns:a16="http://schemas.microsoft.com/office/drawing/2014/main" id="{CED12D37-78C1-F9D0-EECD-FBC3F6E68909}"/>
-                  </a:ext>
-                </a:extLst>
-              </p:cNvPr>
-              <p:cNvPicPr>
-                <a:picLocks noChangeAspect="1"/>
-              </p:cNvPicPr>
-              <p:nvPr/>
-            </p:nvPicPr>
-            <p:blipFill>
-              <a:blip r:embed="rId4"/>
-              <a:stretch>
-                <a:fillRect/>
-              </a:stretch>
-            </p:blipFill>
-            <p:spPr>
-              <a:xfrm>
-                <a:off x="3719736" y="1858792"/>
-                <a:ext cx="2009775" cy="3609975"/>
-              </a:xfrm>
-              <a:prstGeom prst="rect">
-                <a:avLst/>
-              </a:prstGeom>
-            </p:spPr>
-          </p:pic>
-          <p:sp>
-            <p:nvSpPr>
-              <p:cNvPr id="15" name="矩形 14">
-                <a:extLst>
-                  <a:ext uri="{FF2B5EF4-FFF2-40B4-BE49-F238E27FC236}">
-                    <a16:creationId xmlns:a16="http://schemas.microsoft.com/office/drawing/2014/main" id="{4E4A264C-EF59-D6FA-2565-DA9164BA97E9}"/>
-                  </a:ext>
-                </a:extLst>
-              </p:cNvPr>
-              <p:cNvSpPr/>
-              <p:nvPr/>
-            </p:nvSpPr>
-            <p:spPr>
-              <a:xfrm rot="5400000">
-                <a:off x="2999655" y="3356995"/>
-                <a:ext cx="2880321" cy="576064"/>
-              </a:xfrm>
-              <a:prstGeom prst="rect">
-                <a:avLst/>
-              </a:prstGeom>
-              <a:noFill/>
-              <a:ln w="28575">
-                <a:solidFill>
-                  <a:srgbClr val="FF0000"/>
-                </a:solidFill>
-              </a:ln>
-            </p:spPr>
-            <p:style>
-              <a:lnRef idx="2">
-                <a:schemeClr val="accent1">
-                  <a:shade val="15000"/>
-                </a:schemeClr>
-              </a:lnRef>
-              <a:fillRef idx="1">
-                <a:schemeClr val="accent1"/>
-              </a:fillRef>
-              <a:effectRef idx="0">
-                <a:schemeClr val="accent1"/>
-              </a:effectRef>
-              <a:fontRef idx="minor">
-                <a:schemeClr val="lt1"/>
-              </a:fontRef>
-            </p:style>
-            <p:txBody>
-              <a:bodyPr rtlCol="0" anchor="ctr"/>
-              <a:lstStyle/>
-              <a:p>
-                <a:pPr algn="ctr"/>
-                <a:endParaRPr lang="zh-CN" altLang="en-US"/>
-              </a:p>
-            </p:txBody>
-          </p:sp>
-        </p:grpSp>
-        <p:cxnSp>
-          <p:nvCxnSpPr>
-            <p:cNvPr id="19" name="直接连接符 18">
-              <a:extLst>
-                <a:ext uri="{FF2B5EF4-FFF2-40B4-BE49-F238E27FC236}">
-                  <a16:creationId xmlns:a16="http://schemas.microsoft.com/office/drawing/2014/main" id="{51B99BE4-0D58-DA92-DC46-AB3BFCDEA269}"/>
-                </a:ext>
-              </a:extLst>
-            </p:cNvPr>
-            <p:cNvCxnSpPr>
-              <a:stCxn id="8" idx="0"/>
-            </p:cNvCxnSpPr>
-            <p:nvPr/>
-          </p:nvCxnSpPr>
-          <p:spPr>
-            <a:xfrm>
-              <a:off x="4887686" y="4699684"/>
-              <a:ext cx="1616054" cy="521011"/>
-            </a:xfrm>
-            <a:prstGeom prst="line">
-              <a:avLst/>
-            </a:prstGeom>
-            <a:ln w="12700">
-              <a:solidFill>
-                <a:srgbClr val="FF0000"/>
-              </a:solidFill>
-              <a:prstDash val="sysDash"/>
-            </a:ln>
-          </p:spPr>
-          <p:style>
-            <a:lnRef idx="1">
-              <a:schemeClr val="accent1"/>
-            </a:lnRef>
-            <a:fillRef idx="0">
-              <a:schemeClr val="accent1"/>
-            </a:fillRef>
-            <a:effectRef idx="0">
-              <a:schemeClr val="accent1"/>
-            </a:effectRef>
-            <a:fontRef idx="minor">
-              <a:schemeClr val="tx1"/>
-            </a:fontRef>
-          </p:style>
-        </p:cxnSp>
-        <p:cxnSp>
-          <p:nvCxnSpPr>
-            <p:cNvPr id="21" name="直接连接符 20">
-              <a:extLst>
-                <a:ext uri="{FF2B5EF4-FFF2-40B4-BE49-F238E27FC236}">
-                  <a16:creationId xmlns:a16="http://schemas.microsoft.com/office/drawing/2014/main" id="{866C1A0D-F2D7-DF22-C793-D3C1A5D164E8}"/>
-                </a:ext>
-              </a:extLst>
-            </p:cNvPr>
-            <p:cNvCxnSpPr>
-              <a:cxnSpLocks/>
-              <a:stCxn id="4" idx="2"/>
-            </p:cNvCxnSpPr>
-            <p:nvPr/>
-          </p:nvCxnSpPr>
-          <p:spPr>
-            <a:xfrm>
-              <a:off x="5184528" y="2985607"/>
-              <a:ext cx="1642516" cy="2019064"/>
-            </a:xfrm>
-            <a:prstGeom prst="line">
-              <a:avLst/>
-            </a:prstGeom>
-            <a:ln w="12700">
-              <a:solidFill>
-                <a:srgbClr val="FF0000"/>
-              </a:solidFill>
-              <a:prstDash val="sysDash"/>
-            </a:ln>
-          </p:spPr>
-          <p:style>
-            <a:lnRef idx="1">
-              <a:schemeClr val="accent1"/>
-            </a:lnRef>
-            <a:fillRef idx="0">
-              <a:schemeClr val="accent1"/>
-            </a:fillRef>
-            <a:effectRef idx="0">
-              <a:schemeClr val="accent1"/>
-            </a:effectRef>
-            <a:fontRef idx="minor">
-              <a:schemeClr val="tx1"/>
-            </a:fontRef>
-          </p:style>
-        </p:cxnSp>
-        <p:cxnSp>
-          <p:nvCxnSpPr>
-            <p:cNvPr id="23" name="直接连接符 22">
-              <a:extLst>
-                <a:ext uri="{FF2B5EF4-FFF2-40B4-BE49-F238E27FC236}">
-                  <a16:creationId xmlns:a16="http://schemas.microsoft.com/office/drawing/2014/main" id="{596D682A-98A1-9DF4-4F6C-DD80583DA8F1}"/>
-                </a:ext>
-              </a:extLst>
-            </p:cNvPr>
-            <p:cNvCxnSpPr>
-              <a:cxnSpLocks/>
-              <a:stCxn id="15" idx="3"/>
-            </p:cNvCxnSpPr>
-            <p:nvPr/>
-          </p:nvCxnSpPr>
-          <p:spPr>
-            <a:xfrm>
-              <a:off x="7215500" y="4155982"/>
-              <a:ext cx="0" cy="848689"/>
-            </a:xfrm>
-            <a:prstGeom prst="line">
-              <a:avLst/>
-            </a:prstGeom>
-            <a:ln w="12700">
-              <a:solidFill>
-                <a:srgbClr val="FF0000"/>
-              </a:solidFill>
-              <a:prstDash val="sysDash"/>
-            </a:ln>
-          </p:spPr>
-          <p:style>
-            <a:lnRef idx="1">
-              <a:schemeClr val="accent1"/>
-            </a:lnRef>
-            <a:fillRef idx="0">
-              <a:schemeClr val="accent1"/>
-            </a:fillRef>
-            <a:effectRef idx="0">
-              <a:schemeClr val="accent1"/>
-            </a:effectRef>
-            <a:fontRef idx="minor">
-              <a:schemeClr val="tx1"/>
-            </a:fontRef>
-          </p:style>
-        </p:cxnSp>
-        <p:sp>
-          <p:nvSpPr>
-            <p:cNvPr id="27" name="文本框 26">
-              <a:extLst>
-                <a:ext uri="{FF2B5EF4-FFF2-40B4-BE49-F238E27FC236}">
-                  <a16:creationId xmlns:a16="http://schemas.microsoft.com/office/drawing/2014/main" id="{DD12EFF6-9FE3-79C3-0BED-AC8D33C5DB87}"/>
-                </a:ext>
-              </a:extLst>
-            </p:cNvPr>
-            <p:cNvSpPr txBox="1"/>
-            <p:nvPr/>
-          </p:nvSpPr>
-          <p:spPr>
-            <a:xfrm>
-              <a:off x="4217646" y="3307912"/>
-              <a:ext cx="1306383" cy="369332"/>
-            </a:xfrm>
-            <a:prstGeom prst="rect">
-              <a:avLst/>
-            </a:prstGeom>
-            <a:noFill/>
-          </p:spPr>
-          <p:txBody>
-            <a:bodyPr wrap="none" rtlCol="0">
-              <a:spAutoFit/>
-            </a:bodyPr>
-            <a:lstStyle/>
-            <a:p>
-              <a:r>
-                <a:rPr lang="en-US" altLang="zh-CN" dirty="0"/>
-                <a:t>Horizontally</a:t>
-              </a:r>
-              <a:endParaRPr lang="zh-CN" altLang="en-US" dirty="0"/>
-            </a:p>
-          </p:txBody>
-        </p:sp>
-        <p:sp>
-          <p:nvSpPr>
-            <p:cNvPr id="28" name="文本框 27">
-              <a:extLst>
-                <a:ext uri="{FF2B5EF4-FFF2-40B4-BE49-F238E27FC236}">
-                  <a16:creationId xmlns:a16="http://schemas.microsoft.com/office/drawing/2014/main" id="{12B58213-16B7-7650-E667-A9BDCEFA9FE5}"/>
-                </a:ext>
-              </a:extLst>
-            </p:cNvPr>
-            <p:cNvSpPr txBox="1"/>
-            <p:nvPr/>
-          </p:nvSpPr>
-          <p:spPr>
-            <a:xfrm>
-              <a:off x="4129507" y="5686120"/>
-              <a:ext cx="1141659" cy="369332"/>
-            </a:xfrm>
-            <a:prstGeom prst="rect">
-              <a:avLst/>
-            </a:prstGeom>
-            <a:noFill/>
-          </p:spPr>
-          <p:txBody>
-            <a:bodyPr wrap="none" rtlCol="0">
-              <a:spAutoFit/>
-            </a:bodyPr>
-            <a:lstStyle/>
-            <a:p>
-              <a:r>
-                <a:rPr lang="en-US" altLang="zh-CN" dirty="0"/>
-                <a:t>diagonally</a:t>
-              </a:r>
-              <a:endParaRPr lang="zh-CN" altLang="en-US" dirty="0"/>
-            </a:p>
-          </p:txBody>
-        </p:sp>
-        <p:sp>
-          <p:nvSpPr>
-            <p:cNvPr id="29" name="文本框 28">
-              <a:extLst>
-                <a:ext uri="{FF2B5EF4-FFF2-40B4-BE49-F238E27FC236}">
-                  <a16:creationId xmlns:a16="http://schemas.microsoft.com/office/drawing/2014/main" id="{A9D05BB2-B30C-10F1-D38D-C11062E5E4A8}"/>
-                </a:ext>
-              </a:extLst>
-            </p:cNvPr>
-            <p:cNvSpPr txBox="1"/>
-            <p:nvPr/>
-          </p:nvSpPr>
-          <p:spPr>
-            <a:xfrm>
-              <a:off x="7232106" y="4389349"/>
-              <a:ext cx="1028487" cy="369332"/>
-            </a:xfrm>
-            <a:prstGeom prst="rect">
-              <a:avLst/>
-            </a:prstGeom>
-            <a:noFill/>
-          </p:spPr>
-          <p:txBody>
-            <a:bodyPr wrap="none" rtlCol="0">
-              <a:spAutoFit/>
-            </a:bodyPr>
-            <a:lstStyle/>
-            <a:p>
-              <a:r>
-                <a:rPr lang="en-US" altLang="zh-CN" dirty="0"/>
-                <a:t>vertically</a:t>
-              </a:r>
-              <a:endParaRPr lang="zh-CN" altLang="en-US" dirty="0"/>
-            </a:p>
-          </p:txBody>
-        </p:sp>
-        <p:sp>
-          <p:nvSpPr>
-            <p:cNvPr id="31" name="文本框 30">
-              <a:extLst>
-                <a:ext uri="{FF2B5EF4-FFF2-40B4-BE49-F238E27FC236}">
-                  <a16:creationId xmlns:a16="http://schemas.microsoft.com/office/drawing/2014/main" id="{2CEEFC15-A12B-BE34-7388-88090949C877}"/>
-                </a:ext>
-              </a:extLst>
-            </p:cNvPr>
-            <p:cNvSpPr txBox="1"/>
-            <p:nvPr/>
-          </p:nvSpPr>
-          <p:spPr>
-            <a:xfrm>
-              <a:off x="6516251" y="4995191"/>
-              <a:ext cx="2011448" cy="369332"/>
-            </a:xfrm>
-            <a:prstGeom prst="rect">
-              <a:avLst/>
-            </a:prstGeom>
-            <a:noFill/>
-          </p:spPr>
-          <p:txBody>
-            <a:bodyPr wrap="none" rtlCol="0">
-              <a:spAutoFit/>
-            </a:bodyPr>
-            <a:lstStyle/>
-            <a:p>
-              <a:r>
-                <a:rPr lang="en-US" altLang="zh-CN" u="sng" dirty="0"/>
-                <a:t>Five stones</a:t>
-              </a:r>
-              <a:r>
-                <a:rPr lang="en-US" altLang="zh-CN" dirty="0"/>
-                <a:t> in a line</a:t>
-              </a:r>
-              <a:endParaRPr lang="zh-CN" altLang="en-US" dirty="0"/>
-            </a:p>
-          </p:txBody>
-        </p:sp>
-        <p:sp>
-          <p:nvSpPr>
-            <p:cNvPr id="34" name="文本框 33">
-              <a:extLst>
-                <a:ext uri="{FF2B5EF4-FFF2-40B4-BE49-F238E27FC236}">
-                  <a16:creationId xmlns:a16="http://schemas.microsoft.com/office/drawing/2014/main" id="{37510A85-B214-8FA4-EDB5-9B994A718D4C}"/>
-                </a:ext>
-              </a:extLst>
-            </p:cNvPr>
-            <p:cNvSpPr txBox="1"/>
-            <p:nvPr/>
-          </p:nvSpPr>
-          <p:spPr>
-            <a:xfrm>
-              <a:off x="6719764" y="5508727"/>
-              <a:ext cx="758541" cy="369332"/>
-            </a:xfrm>
-            <a:prstGeom prst="rect">
-              <a:avLst/>
-            </a:prstGeom>
-            <a:noFill/>
-          </p:spPr>
-          <p:txBody>
-            <a:bodyPr wrap="none" rtlCol="0">
-              <a:spAutoFit/>
-            </a:bodyPr>
-            <a:lstStyle/>
-            <a:p>
-              <a:r>
-                <a:rPr lang="en-US" altLang="zh-CN" dirty="0"/>
-                <a:t>Gomo</a:t>
-              </a:r>
-              <a:endParaRPr lang="zh-CN" altLang="en-US" dirty="0"/>
-            </a:p>
-          </p:txBody>
-        </p:sp>
-        <p:cxnSp>
-          <p:nvCxnSpPr>
-            <p:cNvPr id="36" name="直接连接符 35">
-              <a:extLst>
-                <a:ext uri="{FF2B5EF4-FFF2-40B4-BE49-F238E27FC236}">
-                  <a16:creationId xmlns:a16="http://schemas.microsoft.com/office/drawing/2014/main" id="{EA8B9819-E716-D790-F377-4547D73DECF3}"/>
-                </a:ext>
-              </a:extLst>
-            </p:cNvPr>
-            <p:cNvCxnSpPr/>
-            <p:nvPr/>
-          </p:nvCxnSpPr>
-          <p:spPr>
-            <a:xfrm>
-              <a:off x="6863780" y="5292703"/>
-              <a:ext cx="0" cy="309665"/>
-            </a:xfrm>
-            <a:prstGeom prst="line">
-              <a:avLst/>
-            </a:prstGeom>
-          </p:spPr>
-          <p:style>
-            <a:lnRef idx="1">
-              <a:schemeClr val="accent1"/>
-            </a:lnRef>
-            <a:fillRef idx="0">
-              <a:schemeClr val="accent1"/>
-            </a:fillRef>
-            <a:effectRef idx="0">
-              <a:schemeClr val="accent1"/>
-            </a:effectRef>
-            <a:fontRef idx="minor">
-              <a:schemeClr val="tx1"/>
-            </a:fontRef>
-          </p:style>
-        </p:cxnSp>
-        <p:cxnSp>
-          <p:nvCxnSpPr>
-            <p:cNvPr id="37" name="直接连接符 36">
-              <a:extLst>
-                <a:ext uri="{FF2B5EF4-FFF2-40B4-BE49-F238E27FC236}">
-                  <a16:creationId xmlns:a16="http://schemas.microsoft.com/office/drawing/2014/main" id="{4478FC3D-93E7-376B-ED63-66786601403F}"/>
-                </a:ext>
-              </a:extLst>
-            </p:cNvPr>
-            <p:cNvCxnSpPr>
-              <a:cxnSpLocks/>
-            </p:cNvCxnSpPr>
-            <p:nvPr/>
-          </p:nvCxnSpPr>
-          <p:spPr>
-            <a:xfrm>
-              <a:off x="6933681" y="5810844"/>
-              <a:ext cx="62490" cy="134231"/>
-            </a:xfrm>
-            <a:prstGeom prst="line">
-              <a:avLst/>
-            </a:prstGeom>
-          </p:spPr>
-          <p:style>
-            <a:lnRef idx="1">
-              <a:schemeClr val="accent1"/>
-            </a:lnRef>
-            <a:fillRef idx="0">
-              <a:schemeClr val="accent1"/>
-            </a:fillRef>
-            <a:effectRef idx="0">
-              <a:schemeClr val="accent1"/>
-            </a:effectRef>
-            <a:fontRef idx="minor">
-              <a:schemeClr val="tx1"/>
-            </a:fontRef>
-          </p:style>
-        </p:cxnSp>
-        <p:cxnSp>
-          <p:nvCxnSpPr>
-            <p:cNvPr id="41" name="直接连接符 40">
-              <a:extLst>
-                <a:ext uri="{FF2B5EF4-FFF2-40B4-BE49-F238E27FC236}">
-                  <a16:creationId xmlns:a16="http://schemas.microsoft.com/office/drawing/2014/main" id="{F1C98199-AA93-9396-43A1-FBF9A7B17BE0}"/>
-                </a:ext>
-              </a:extLst>
-            </p:cNvPr>
-            <p:cNvCxnSpPr>
-              <a:cxnSpLocks/>
-            </p:cNvCxnSpPr>
-            <p:nvPr/>
-          </p:nvCxnSpPr>
-          <p:spPr>
-            <a:xfrm>
-              <a:off x="7274490" y="5299740"/>
-              <a:ext cx="0" cy="352815"/>
-            </a:xfrm>
-            <a:prstGeom prst="line">
-              <a:avLst/>
-            </a:prstGeom>
-          </p:spPr>
-          <p:style>
-            <a:lnRef idx="1">
-              <a:schemeClr val="accent1"/>
-            </a:lnRef>
-            <a:fillRef idx="0">
-              <a:schemeClr val="accent1"/>
-            </a:fillRef>
-            <a:effectRef idx="0">
-              <a:schemeClr val="accent1"/>
-            </a:effectRef>
-            <a:fontRef idx="minor">
-              <a:schemeClr val="tx1"/>
-            </a:fontRef>
-          </p:style>
-        </p:cxnSp>
-        <p:cxnSp>
-          <p:nvCxnSpPr>
-            <p:cNvPr id="44" name="直接连接符 43">
-              <a:extLst>
-                <a:ext uri="{FF2B5EF4-FFF2-40B4-BE49-F238E27FC236}">
-                  <a16:creationId xmlns:a16="http://schemas.microsoft.com/office/drawing/2014/main" id="{9E6D0104-689F-EDD5-B6AE-19CB9C64EF80}"/>
-                </a:ext>
-              </a:extLst>
-            </p:cNvPr>
-            <p:cNvCxnSpPr>
-              <a:cxnSpLocks/>
-            </p:cNvCxnSpPr>
-            <p:nvPr/>
-          </p:nvCxnSpPr>
-          <p:spPr>
-            <a:xfrm flipH="1">
-              <a:off x="7200497" y="5810844"/>
-              <a:ext cx="85740" cy="134231"/>
-            </a:xfrm>
-            <a:prstGeom prst="line">
-              <a:avLst/>
-            </a:prstGeom>
-          </p:spPr>
-          <p:style>
-            <a:lnRef idx="1">
-              <a:schemeClr val="accent1"/>
-            </a:lnRef>
-            <a:fillRef idx="0">
-              <a:schemeClr val="accent1"/>
-            </a:fillRef>
-            <a:effectRef idx="0">
-              <a:schemeClr val="accent1"/>
-            </a:effectRef>
-            <a:fontRef idx="minor">
-              <a:schemeClr val="tx1"/>
-            </a:fontRef>
-          </p:style>
-        </p:cxnSp>
-        <p:sp>
-          <p:nvSpPr>
-            <p:cNvPr id="47" name="矩形 46">
-              <a:extLst>
-                <a:ext uri="{FF2B5EF4-FFF2-40B4-BE49-F238E27FC236}">
-                  <a16:creationId xmlns:a16="http://schemas.microsoft.com/office/drawing/2014/main" id="{CE424D91-EA71-2DC3-8C4E-54B0C30FB1F9}"/>
-                </a:ext>
-              </a:extLst>
-            </p:cNvPr>
-            <p:cNvSpPr/>
-            <p:nvPr/>
-          </p:nvSpPr>
-          <p:spPr>
-            <a:xfrm>
-              <a:off x="6575748" y="5089378"/>
-              <a:ext cx="420423" cy="216024"/>
-            </a:xfrm>
-            <a:prstGeom prst="rect">
-              <a:avLst/>
-            </a:prstGeom>
-            <a:noFill/>
-          </p:spPr>
-          <p:style>
-            <a:lnRef idx="2">
-              <a:schemeClr val="accent1">
-                <a:shade val="15000"/>
-              </a:schemeClr>
-            </a:lnRef>
-            <a:fillRef idx="1">
-              <a:schemeClr val="accent1"/>
-            </a:fillRef>
-            <a:effectRef idx="0">
-              <a:schemeClr val="accent1"/>
-            </a:effectRef>
-            <a:fontRef idx="minor">
-              <a:schemeClr val="lt1"/>
-            </a:fontRef>
-          </p:style>
-          <p:txBody>
-            <a:bodyPr rtlCol="0" anchor="ctr"/>
-            <a:lstStyle/>
-            <a:p>
-              <a:pPr algn="ctr"/>
-              <a:endParaRPr lang="zh-CN" altLang="en-US"/>
-            </a:p>
-          </p:txBody>
-        </p:sp>
-        <p:sp>
-          <p:nvSpPr>
-            <p:cNvPr id="48" name="矩形 47">
-              <a:extLst>
-                <a:ext uri="{FF2B5EF4-FFF2-40B4-BE49-F238E27FC236}">
-                  <a16:creationId xmlns:a16="http://schemas.microsoft.com/office/drawing/2014/main" id="{D99578F3-1F57-D2E8-9A99-27C221A99446}"/>
-                </a:ext>
-              </a:extLst>
-            </p:cNvPr>
-            <p:cNvSpPr/>
-            <p:nvPr/>
-          </p:nvSpPr>
-          <p:spPr>
-            <a:xfrm>
-              <a:off x="7016179" y="5089487"/>
-              <a:ext cx="639685" cy="216024"/>
-            </a:xfrm>
-            <a:prstGeom prst="rect">
-              <a:avLst/>
-            </a:prstGeom>
-            <a:noFill/>
-          </p:spPr>
-          <p:style>
-            <a:lnRef idx="2">
-              <a:schemeClr val="accent1">
-                <a:shade val="15000"/>
-              </a:schemeClr>
-            </a:lnRef>
-            <a:fillRef idx="1">
-              <a:schemeClr val="accent1"/>
-            </a:fillRef>
-            <a:effectRef idx="0">
-              <a:schemeClr val="accent1"/>
-            </a:effectRef>
-            <a:fontRef idx="minor">
-              <a:schemeClr val="lt1"/>
-            </a:fontRef>
-          </p:style>
-          <p:txBody>
-            <a:bodyPr rtlCol="0" anchor="ctr"/>
-            <a:lstStyle/>
-            <a:p>
-              <a:pPr algn="ctr"/>
-              <a:endParaRPr lang="zh-CN" altLang="en-US"/>
-            </a:p>
-          </p:txBody>
-        </p:sp>
-        <p:sp>
-          <p:nvSpPr>
-            <p:cNvPr id="49" name="文本框 48">
-              <a:extLst>
-                <a:ext uri="{FF2B5EF4-FFF2-40B4-BE49-F238E27FC236}">
-                  <a16:creationId xmlns:a16="http://schemas.microsoft.com/office/drawing/2014/main" id="{E15F4E0F-0403-410B-9164-BA2DE51A6080}"/>
-                </a:ext>
-              </a:extLst>
-            </p:cNvPr>
-            <p:cNvSpPr txBox="1"/>
-            <p:nvPr/>
-          </p:nvSpPr>
-          <p:spPr>
-            <a:xfrm>
-              <a:off x="6764952" y="5907055"/>
-              <a:ext cx="646331" cy="369332"/>
-            </a:xfrm>
-            <a:prstGeom prst="rect">
-              <a:avLst/>
-            </a:prstGeom>
-            <a:noFill/>
-          </p:spPr>
-          <p:txBody>
-            <a:bodyPr wrap="none" rtlCol="0">
-              <a:spAutoFit/>
-            </a:bodyPr>
-            <a:lstStyle/>
-            <a:p>
-              <a:r>
-                <a:rPr lang="zh-CN" altLang="en-US" dirty="0"/>
-                <a:t>五目</a:t>
-              </a:r>
-            </a:p>
-          </p:txBody>
-        </p:sp>
-        <p:sp>
-          <p:nvSpPr>
-            <p:cNvPr id="57" name="文本框 56">
-              <a:extLst>
-                <a:ext uri="{FF2B5EF4-FFF2-40B4-BE49-F238E27FC236}">
-                  <a16:creationId xmlns:a16="http://schemas.microsoft.com/office/drawing/2014/main" id="{8CD9A4E0-1718-2855-00BC-4F05A27C60EF}"/>
-                </a:ext>
-              </a:extLst>
-            </p:cNvPr>
-            <p:cNvSpPr txBox="1"/>
-            <p:nvPr/>
-          </p:nvSpPr>
-          <p:spPr>
-            <a:xfrm>
-              <a:off x="4067504" y="1498552"/>
-              <a:ext cx="3962239" cy="369332"/>
-            </a:xfrm>
-            <a:prstGeom prst="rect">
-              <a:avLst/>
-            </a:prstGeom>
-            <a:noFill/>
-          </p:spPr>
-          <p:txBody>
-            <a:bodyPr wrap="none" rtlCol="0">
-              <a:spAutoFit/>
-            </a:bodyPr>
-            <a:lstStyle/>
-            <a:p>
-              <a:r>
-                <a:rPr lang="en-US" altLang="zh-CN" b="1" dirty="0"/>
-                <a:t>One Player Wins (Black in This Example)</a:t>
-              </a:r>
-              <a:endParaRPr lang="zh-CN" altLang="en-US" b="1" dirty="0"/>
-            </a:p>
-          </p:txBody>
-        </p:sp>
-      </p:grpSp>
-      <p:grpSp>
-        <p:nvGrpSpPr>
-          <p:cNvPr id="1048603" name="组合 1048602">
-            <a:extLst>
-              <a:ext uri="{FF2B5EF4-FFF2-40B4-BE49-F238E27FC236}">
-                <a16:creationId xmlns:a16="http://schemas.microsoft.com/office/drawing/2014/main" id="{4186C3BB-F242-DC36-B0C5-CB51323D2065}"/>
-              </a:ext>
-            </a:extLst>
-          </p:cNvPr>
-          <p:cNvGrpSpPr/>
-          <p:nvPr/>
-        </p:nvGrpSpPr>
-        <p:grpSpPr>
-          <a:xfrm>
-            <a:off x="8721203" y="1484784"/>
-            <a:ext cx="2600570" cy="2671198"/>
-            <a:chOff x="8721203" y="1484784"/>
-            <a:chExt cx="2600570" cy="2671198"/>
-          </a:xfrm>
-        </p:grpSpPr>
-        <p:pic>
-          <p:nvPicPr>
-            <p:cNvPr id="59" name="图片 58">
-              <a:extLst>
-                <a:ext uri="{FF2B5EF4-FFF2-40B4-BE49-F238E27FC236}">
-                  <a16:creationId xmlns:a16="http://schemas.microsoft.com/office/drawing/2014/main" id="{C9E66E03-6B1E-D34C-13BC-C2501FDF3333}"/>
-                </a:ext>
-              </a:extLst>
-            </p:cNvPr>
-            <p:cNvPicPr>
-              <a:picLocks noChangeAspect="1"/>
-            </p:cNvPicPr>
-            <p:nvPr/>
-          </p:nvPicPr>
-          <p:blipFill>
-            <a:blip r:embed="rId5"/>
-            <a:stretch>
-              <a:fillRect/>
-            </a:stretch>
-          </p:blipFill>
-          <p:spPr>
-            <a:xfrm>
-              <a:off x="8989214" y="1954599"/>
-              <a:ext cx="1515475" cy="1530731"/>
-            </a:xfrm>
-            <a:prstGeom prst="rect">
-              <a:avLst/>
-            </a:prstGeom>
-          </p:spPr>
-        </p:pic>
-        <p:sp>
-          <p:nvSpPr>
-            <p:cNvPr id="60" name="文本框 59">
-              <a:extLst>
-                <a:ext uri="{FF2B5EF4-FFF2-40B4-BE49-F238E27FC236}">
-                  <a16:creationId xmlns:a16="http://schemas.microsoft.com/office/drawing/2014/main" id="{1930A934-A9CE-5927-9FD8-13A694CC8174}"/>
-                </a:ext>
-              </a:extLst>
-            </p:cNvPr>
-            <p:cNvSpPr txBox="1"/>
-            <p:nvPr/>
-          </p:nvSpPr>
-          <p:spPr>
-            <a:xfrm>
-              <a:off x="8721203" y="1484784"/>
-              <a:ext cx="2337050" cy="369332"/>
-            </a:xfrm>
-            <a:prstGeom prst="rect">
-              <a:avLst/>
-            </a:prstGeom>
-            <a:noFill/>
-          </p:spPr>
-          <p:txBody>
-            <a:bodyPr wrap="none" rtlCol="0">
-              <a:spAutoFit/>
-            </a:bodyPr>
-            <a:lstStyle/>
-            <a:p>
-              <a:r>
-                <a:rPr lang="en-US" altLang="zh-CN" b="1" dirty="0"/>
-                <a:t>A Draw (No One Wins)</a:t>
-              </a:r>
-              <a:endParaRPr lang="zh-CN" altLang="en-US" b="1" dirty="0"/>
-            </a:p>
-          </p:txBody>
-        </p:sp>
-        <p:sp>
-          <p:nvSpPr>
-            <p:cNvPr id="61" name="文本框 60">
-              <a:extLst>
-                <a:ext uri="{FF2B5EF4-FFF2-40B4-BE49-F238E27FC236}">
-                  <a16:creationId xmlns:a16="http://schemas.microsoft.com/office/drawing/2014/main" id="{3C421D74-4FB0-190D-7F6B-1C8F7D50B6A9}"/>
-                </a:ext>
-              </a:extLst>
-            </p:cNvPr>
-            <p:cNvSpPr txBox="1"/>
-            <p:nvPr/>
-          </p:nvSpPr>
-          <p:spPr>
-            <a:xfrm>
-              <a:off x="10528914" y="2071214"/>
-              <a:ext cx="792859" cy="1277273"/>
-            </a:xfrm>
-            <a:prstGeom prst="rect">
-              <a:avLst/>
-            </a:prstGeom>
-            <a:noFill/>
-          </p:spPr>
-          <p:txBody>
-            <a:bodyPr wrap="square" rtlCol="0">
-              <a:spAutoFit/>
-            </a:bodyPr>
-            <a:lstStyle/>
-            <a:p>
-              <a:r>
-                <a:rPr lang="en-US" altLang="zh-CN" sz="1100" dirty="0"/>
-                <a:t>(e.g. we</a:t>
-              </a:r>
-            </a:p>
-            <a:p>
-              <a:r>
-                <a:rPr lang="en-US" altLang="zh-CN" sz="1100" dirty="0"/>
-                <a:t>suppose</a:t>
-              </a:r>
-            </a:p>
-            <a:p>
-              <a:r>
-                <a:rPr lang="en-US" altLang="zh-CN" sz="1100" dirty="0"/>
-                <a:t>the board</a:t>
-              </a:r>
-            </a:p>
-            <a:p>
-              <a:r>
-                <a:rPr lang="en-US" altLang="zh-CN" sz="1100" dirty="0"/>
-                <a:t>is scaled </a:t>
-              </a:r>
-            </a:p>
-            <a:p>
-              <a:r>
-                <a:rPr lang="en-US" altLang="zh-CN" sz="1100" dirty="0"/>
-                <a:t>down</a:t>
-              </a:r>
-            </a:p>
-            <a:p>
-              <a:r>
-                <a:rPr lang="en-US" altLang="zh-CN" sz="1100" dirty="0"/>
-                <a:t>to be</a:t>
-              </a:r>
-            </a:p>
-            <a:p>
-              <a:r>
-                <a:rPr lang="en-US" altLang="zh-CN" sz="1100" dirty="0"/>
-                <a:t>5×5)</a:t>
-              </a:r>
-              <a:endParaRPr lang="zh-CN" altLang="en-US" sz="1100" dirty="0"/>
-            </a:p>
-          </p:txBody>
-        </p:sp>
-        <p:sp>
-          <p:nvSpPr>
-            <p:cNvPr id="62" name="文本框 61">
-              <a:extLst>
-                <a:ext uri="{FF2B5EF4-FFF2-40B4-BE49-F238E27FC236}">
-                  <a16:creationId xmlns:a16="http://schemas.microsoft.com/office/drawing/2014/main" id="{58DD9226-A8DE-9715-7369-D56A7B83B511}"/>
-                </a:ext>
-              </a:extLst>
-            </p:cNvPr>
-            <p:cNvSpPr txBox="1"/>
-            <p:nvPr/>
-          </p:nvSpPr>
-          <p:spPr>
-            <a:xfrm>
-              <a:off x="8872688" y="3509651"/>
-              <a:ext cx="2077813" cy="646331"/>
-            </a:xfrm>
-            <a:prstGeom prst="rect">
-              <a:avLst/>
-            </a:prstGeom>
-            <a:noFill/>
-          </p:spPr>
-          <p:txBody>
-            <a:bodyPr wrap="none" rtlCol="0">
-              <a:spAutoFit/>
-            </a:bodyPr>
-            <a:lstStyle/>
-            <a:p>
-              <a:r>
-                <a:rPr lang="en-US" altLang="zh-CN" sz="1200" dirty="0"/>
-                <a:t>All positions for stones (chess)</a:t>
-              </a:r>
-            </a:p>
-            <a:p>
-              <a:r>
-                <a:rPr lang="en-US" altLang="zh-CN" sz="1200" dirty="0"/>
-                <a:t>are taken without reaching</a:t>
-              </a:r>
-            </a:p>
-            <a:p>
-              <a:r>
-                <a:rPr lang="en-US" altLang="zh-CN" sz="1200" dirty="0"/>
-                <a:t>the winning condition.</a:t>
-              </a:r>
-              <a:endParaRPr lang="zh-CN" altLang="en-US" sz="1200" dirty="0"/>
-            </a:p>
-          </p:txBody>
-        </p:sp>
-      </p:grpSp>
-      <p:grpSp>
-        <p:nvGrpSpPr>
-          <p:cNvPr id="1048600" name="组合 1048599">
-            <a:extLst>
-              <a:ext uri="{FF2B5EF4-FFF2-40B4-BE49-F238E27FC236}">
-                <a16:creationId xmlns:a16="http://schemas.microsoft.com/office/drawing/2014/main" id="{297DF267-9534-5662-9752-7DC738BDD815}"/>
-              </a:ext>
-            </a:extLst>
-          </p:cNvPr>
-          <p:cNvGrpSpPr/>
-          <p:nvPr/>
-        </p:nvGrpSpPr>
-        <p:grpSpPr>
-          <a:xfrm>
-            <a:off x="839416" y="1498552"/>
-            <a:ext cx="2334588" cy="2307621"/>
-            <a:chOff x="839416" y="1498552"/>
-            <a:chExt cx="2334588" cy="2307621"/>
-          </a:xfrm>
-        </p:grpSpPr>
-        <p:pic>
-          <p:nvPicPr>
-            <p:cNvPr id="1048576" name="图片 1048575">
-              <a:extLst>
-                <a:ext uri="{FF2B5EF4-FFF2-40B4-BE49-F238E27FC236}">
-                  <a16:creationId xmlns:a16="http://schemas.microsoft.com/office/drawing/2014/main" id="{E4172A11-1B2A-9DAF-14D6-31A8A964F780}"/>
-                </a:ext>
-              </a:extLst>
-            </p:cNvPr>
-            <p:cNvPicPr>
-              <a:picLocks noChangeAspect="1"/>
-            </p:cNvPicPr>
-            <p:nvPr/>
-          </p:nvPicPr>
-          <p:blipFill>
-            <a:blip r:embed="rId6"/>
-            <a:stretch>
-              <a:fillRect/>
-            </a:stretch>
-          </p:blipFill>
-          <p:spPr>
-            <a:xfrm>
-              <a:off x="839416" y="1981937"/>
-              <a:ext cx="2334588" cy="1824236"/>
-            </a:xfrm>
-            <a:prstGeom prst="rect">
-              <a:avLst/>
-            </a:prstGeom>
-          </p:spPr>
-        </p:pic>
-        <p:sp>
-          <p:nvSpPr>
-            <p:cNvPr id="1048577" name="文本框 1048576">
-              <a:extLst>
-                <a:ext uri="{FF2B5EF4-FFF2-40B4-BE49-F238E27FC236}">
-                  <a16:creationId xmlns:a16="http://schemas.microsoft.com/office/drawing/2014/main" id="{FF5BEC2E-2496-9F2B-4028-C7C5F954E8FA}"/>
-                </a:ext>
-              </a:extLst>
-            </p:cNvPr>
-            <p:cNvSpPr txBox="1"/>
-            <p:nvPr/>
-          </p:nvSpPr>
-          <p:spPr>
-            <a:xfrm>
-              <a:off x="839416" y="1498552"/>
-              <a:ext cx="2156744" cy="369332"/>
-            </a:xfrm>
-            <a:prstGeom prst="rect">
-              <a:avLst/>
-            </a:prstGeom>
-            <a:noFill/>
-          </p:spPr>
-          <p:txBody>
-            <a:bodyPr wrap="none" rtlCol="0">
-              <a:spAutoFit/>
-            </a:bodyPr>
-            <a:lstStyle/>
-            <a:p>
-              <a:r>
-                <a:rPr lang="en-US" altLang="zh-CN" b="1" dirty="0"/>
-                <a:t>15</a:t>
-              </a:r>
-              <a:r>
-                <a:rPr lang="en-US" altLang="zh-CN" sz="1800" b="1" dirty="0"/>
-                <a:t>×15 Chess Board</a:t>
-              </a:r>
-              <a:r>
-                <a:rPr lang="en-US" altLang="zh-CN" b="1" dirty="0"/>
-                <a:t> </a:t>
-              </a:r>
-              <a:endParaRPr lang="zh-CN" altLang="en-US" b="1" dirty="0"/>
-            </a:p>
-          </p:txBody>
-        </p:sp>
-      </p:grpSp>
-      <p:grpSp>
-        <p:nvGrpSpPr>
-          <p:cNvPr id="1048606" name="组合 1048605">
-            <a:extLst>
-              <a:ext uri="{FF2B5EF4-FFF2-40B4-BE49-F238E27FC236}">
-                <a16:creationId xmlns:a16="http://schemas.microsoft.com/office/drawing/2014/main" id="{812B2413-84EF-FA92-75BB-C6BBA1D589EF}"/>
-              </a:ext>
-            </a:extLst>
-          </p:cNvPr>
-          <p:cNvGrpSpPr/>
-          <p:nvPr/>
-        </p:nvGrpSpPr>
-        <p:grpSpPr>
-          <a:xfrm>
-            <a:off x="8730949" y="4210994"/>
-            <a:ext cx="2996827" cy="2021371"/>
-            <a:chOff x="8730949" y="4210994"/>
-            <a:chExt cx="2996827" cy="2021371"/>
-          </a:xfrm>
-        </p:grpSpPr>
-        <p:pic>
-          <p:nvPicPr>
-            <p:cNvPr id="1048593" name="图片 1048592">
-              <a:extLst>
-                <a:ext uri="{FF2B5EF4-FFF2-40B4-BE49-F238E27FC236}">
-                  <a16:creationId xmlns:a16="http://schemas.microsoft.com/office/drawing/2014/main" id="{B16C3330-E60B-A536-2FF4-19489C47C30E}"/>
-                </a:ext>
-              </a:extLst>
-            </p:cNvPr>
-            <p:cNvPicPr>
-              <a:picLocks noChangeAspect="1"/>
-            </p:cNvPicPr>
-            <p:nvPr/>
-          </p:nvPicPr>
-          <p:blipFill>
-            <a:blip r:embed="rId7"/>
-            <a:stretch>
-              <a:fillRect/>
-            </a:stretch>
-          </p:blipFill>
-          <p:spPr>
-            <a:xfrm>
-              <a:off x="8890824" y="4901668"/>
-              <a:ext cx="1027321" cy="1058770"/>
-            </a:xfrm>
-            <a:prstGeom prst="rect">
-              <a:avLst/>
-            </a:prstGeom>
-          </p:spPr>
-        </p:pic>
-        <p:sp>
-          <p:nvSpPr>
-            <p:cNvPr id="1048586" name="箭头: 下 1048585">
-              <a:extLst>
-                <a:ext uri="{FF2B5EF4-FFF2-40B4-BE49-F238E27FC236}">
-                  <a16:creationId xmlns:a16="http://schemas.microsoft.com/office/drawing/2014/main" id="{61C18724-532A-0865-2AED-3AE7243F4F26}"/>
-                </a:ext>
-              </a:extLst>
-            </p:cNvPr>
-            <p:cNvSpPr/>
-            <p:nvPr/>
-          </p:nvSpPr>
-          <p:spPr>
-            <a:xfrm>
-              <a:off x="9332477" y="5000727"/>
-              <a:ext cx="144016" cy="222719"/>
-            </a:xfrm>
-            <a:prstGeom prst="downArrow">
-              <a:avLst/>
-            </a:prstGeom>
-            <a:solidFill>
-              <a:srgbClr val="FF0000"/>
-            </a:solidFill>
-            <a:ln>
-              <a:solidFill>
-                <a:srgbClr val="C00000"/>
-              </a:solidFill>
-            </a:ln>
-          </p:spPr>
-          <p:style>
-            <a:lnRef idx="2">
-              <a:schemeClr val="accent1">
-                <a:shade val="15000"/>
-              </a:schemeClr>
-            </a:lnRef>
-            <a:fillRef idx="1">
-              <a:schemeClr val="accent1"/>
-            </a:fillRef>
-            <a:effectRef idx="0">
-              <a:schemeClr val="accent1"/>
-            </a:effectRef>
-            <a:fontRef idx="minor">
-              <a:schemeClr val="lt1"/>
-            </a:fontRef>
-          </p:style>
-          <p:txBody>
-            <a:bodyPr rtlCol="0" anchor="ctr"/>
-            <a:lstStyle/>
-            <a:p>
-              <a:pPr algn="ctr"/>
-              <a:endParaRPr lang="zh-CN" altLang="en-US"/>
-            </a:p>
-          </p:txBody>
-        </p:sp>
-        <p:sp>
-          <p:nvSpPr>
-            <p:cNvPr id="1048588" name="文本框 1048587">
-              <a:extLst>
-                <a:ext uri="{FF2B5EF4-FFF2-40B4-BE49-F238E27FC236}">
-                  <a16:creationId xmlns:a16="http://schemas.microsoft.com/office/drawing/2014/main" id="{9B1D29E0-FEE4-511C-430D-FFE53B5A0511}"/>
-                </a:ext>
-              </a:extLst>
-            </p:cNvPr>
-            <p:cNvSpPr txBox="1"/>
-            <p:nvPr/>
-          </p:nvSpPr>
-          <p:spPr>
-            <a:xfrm>
-              <a:off x="8730949" y="4616964"/>
-              <a:ext cx="1413079" cy="338554"/>
-            </a:xfrm>
-            <a:prstGeom prst="rect">
-              <a:avLst/>
-            </a:prstGeom>
-            <a:noFill/>
-          </p:spPr>
-          <p:txBody>
-            <a:bodyPr wrap="none" rtlCol="0">
-              <a:spAutoFit/>
-            </a:bodyPr>
-            <a:lstStyle/>
-            <a:p>
-              <a:r>
-                <a:rPr lang="en-US" altLang="zh-CN" sz="1600" dirty="0"/>
-                <a:t>Already Placed</a:t>
-              </a:r>
-              <a:endParaRPr lang="zh-CN" altLang="en-US" sz="1600" dirty="0"/>
-            </a:p>
-          </p:txBody>
-        </p:sp>
-        <p:sp>
-          <p:nvSpPr>
-            <p:cNvPr id="1048591" name="文本框 1048590">
-              <a:extLst>
-                <a:ext uri="{FF2B5EF4-FFF2-40B4-BE49-F238E27FC236}">
-                  <a16:creationId xmlns:a16="http://schemas.microsoft.com/office/drawing/2014/main" id="{ADB2888C-76CF-00FC-817D-0CE3F47CF1FF}"/>
-                </a:ext>
-              </a:extLst>
-            </p:cNvPr>
-            <p:cNvSpPr txBox="1"/>
-            <p:nvPr/>
-          </p:nvSpPr>
-          <p:spPr>
-            <a:xfrm>
-              <a:off x="8771394" y="4210994"/>
-              <a:ext cx="1266180" cy="369332"/>
-            </a:xfrm>
-            <a:prstGeom prst="rect">
-              <a:avLst/>
-            </a:prstGeom>
-            <a:noFill/>
-          </p:spPr>
-          <p:txBody>
-            <a:bodyPr wrap="none" rtlCol="0">
-              <a:spAutoFit/>
-            </a:bodyPr>
-            <a:lstStyle/>
-            <a:p>
-              <a:r>
-                <a:rPr lang="en-US" altLang="zh-CN" b="1" dirty="0"/>
-                <a:t>No Overlap</a:t>
-              </a:r>
-              <a:endParaRPr lang="zh-CN" altLang="en-US" b="1" dirty="0"/>
-            </a:p>
-          </p:txBody>
-        </p:sp>
-        <p:sp>
-          <p:nvSpPr>
-            <p:cNvPr id="1048594" name="箭头: 上弧形 1048593">
-              <a:extLst>
-                <a:ext uri="{FF2B5EF4-FFF2-40B4-BE49-F238E27FC236}">
-                  <a16:creationId xmlns:a16="http://schemas.microsoft.com/office/drawing/2014/main" id="{F4096DCA-0183-C0CD-1A6D-F09A6A66C985}"/>
-                </a:ext>
-              </a:extLst>
-            </p:cNvPr>
-            <p:cNvSpPr/>
-            <p:nvPr/>
-          </p:nvSpPr>
-          <p:spPr>
-            <a:xfrm flipH="1">
-              <a:off x="9532963" y="5074678"/>
-              <a:ext cx="441653" cy="210358"/>
-            </a:xfrm>
-            <a:prstGeom prst="curvedDownArrow">
-              <a:avLst/>
-            </a:prstGeom>
-          </p:spPr>
-          <p:style>
-            <a:lnRef idx="2">
-              <a:schemeClr val="accent1">
-                <a:shade val="15000"/>
-              </a:schemeClr>
-            </a:lnRef>
-            <a:fillRef idx="1">
-              <a:schemeClr val="accent1"/>
-            </a:fillRef>
-            <a:effectRef idx="0">
-              <a:schemeClr val="accent1"/>
-            </a:effectRef>
-            <a:fontRef idx="minor">
-              <a:schemeClr val="lt1"/>
-            </a:fontRef>
-          </p:style>
-          <p:txBody>
-            <a:bodyPr rtlCol="0" anchor="ctr"/>
-            <a:lstStyle/>
-            <a:p>
-              <a:pPr algn="ctr"/>
-              <a:endParaRPr lang="zh-CN" altLang="en-US">
-                <a:solidFill>
-                  <a:schemeClr val="tx1"/>
-                </a:solidFill>
-              </a:endParaRPr>
-            </a:p>
-          </p:txBody>
-        </p:sp>
-        <p:sp>
-          <p:nvSpPr>
-            <p:cNvPr id="1048595" name="椭圆 1048594">
-              <a:extLst>
-                <a:ext uri="{FF2B5EF4-FFF2-40B4-BE49-F238E27FC236}">
-                  <a16:creationId xmlns:a16="http://schemas.microsoft.com/office/drawing/2014/main" id="{8BF75A24-D21B-1EE0-2AC1-E55739851DEC}"/>
-                </a:ext>
-              </a:extLst>
-            </p:cNvPr>
-            <p:cNvSpPr/>
-            <p:nvPr/>
-          </p:nvSpPr>
-          <p:spPr>
-            <a:xfrm>
-              <a:off x="9853219" y="5318960"/>
-              <a:ext cx="242794" cy="242794"/>
-            </a:xfrm>
-            <a:prstGeom prst="ellipse">
-              <a:avLst/>
-            </a:prstGeom>
-            <a:noFill/>
-            <a:ln>
-              <a:prstDash val="sysDash"/>
-            </a:ln>
-          </p:spPr>
-          <p:style>
-            <a:lnRef idx="2">
-              <a:schemeClr val="accent1">
-                <a:shade val="15000"/>
-              </a:schemeClr>
-            </a:lnRef>
-            <a:fillRef idx="1">
-              <a:schemeClr val="accent1"/>
-            </a:fillRef>
-            <a:effectRef idx="0">
-              <a:schemeClr val="accent1"/>
-            </a:effectRef>
-            <a:fontRef idx="minor">
-              <a:schemeClr val="lt1"/>
-            </a:fontRef>
-          </p:style>
-          <p:txBody>
-            <a:bodyPr rtlCol="0" anchor="ctr"/>
-            <a:lstStyle/>
-            <a:p>
-              <a:pPr algn="ctr"/>
-              <a:endParaRPr lang="zh-CN" altLang="en-US"/>
-            </a:p>
-          </p:txBody>
-        </p:sp>
-        <p:sp>
-          <p:nvSpPr>
-            <p:cNvPr id="1048596" name="乘号 1048595">
-              <a:extLst>
-                <a:ext uri="{FF2B5EF4-FFF2-40B4-BE49-F238E27FC236}">
-                  <a16:creationId xmlns:a16="http://schemas.microsoft.com/office/drawing/2014/main" id="{D56BAF49-6869-40D3-2B98-73E33113DAF9}"/>
-                </a:ext>
-              </a:extLst>
-            </p:cNvPr>
-            <p:cNvSpPr/>
-            <p:nvPr/>
-          </p:nvSpPr>
-          <p:spPr>
-            <a:xfrm>
-              <a:off x="9646153" y="4970478"/>
-              <a:ext cx="237799" cy="237799"/>
-            </a:xfrm>
-            <a:prstGeom prst="mathMultiply">
-              <a:avLst/>
-            </a:prstGeom>
-            <a:solidFill>
-              <a:srgbClr val="FF0000"/>
-            </a:solidFill>
-            <a:ln>
-              <a:solidFill>
-                <a:srgbClr val="C00000"/>
-              </a:solidFill>
-            </a:ln>
-          </p:spPr>
-          <p:style>
-            <a:lnRef idx="2">
-              <a:schemeClr val="accent1">
-                <a:shade val="15000"/>
-              </a:schemeClr>
-            </a:lnRef>
-            <a:fillRef idx="1">
-              <a:schemeClr val="accent1"/>
-            </a:fillRef>
-            <a:effectRef idx="0">
-              <a:schemeClr val="accent1"/>
-            </a:effectRef>
-            <a:fontRef idx="minor">
-              <a:schemeClr val="lt1"/>
-            </a:fontRef>
-          </p:style>
-          <p:txBody>
-            <a:bodyPr rtlCol="0" anchor="ctr"/>
-            <a:lstStyle/>
-            <a:p>
-              <a:pPr algn="ctr"/>
-              <a:endParaRPr lang="zh-CN" altLang="en-US"/>
-            </a:p>
-          </p:txBody>
-        </p:sp>
-        <p:sp>
-          <p:nvSpPr>
-            <p:cNvPr id="1048597" name="文本框 1048596">
-              <a:extLst>
-                <a:ext uri="{FF2B5EF4-FFF2-40B4-BE49-F238E27FC236}">
-                  <a16:creationId xmlns:a16="http://schemas.microsoft.com/office/drawing/2014/main" id="{12DA8386-977B-F384-D34C-8366A0B09032}"/>
-                </a:ext>
-              </a:extLst>
-            </p:cNvPr>
-            <p:cNvSpPr txBox="1"/>
-            <p:nvPr/>
-          </p:nvSpPr>
-          <p:spPr>
-            <a:xfrm>
-              <a:off x="10200498" y="4662705"/>
-              <a:ext cx="1527278" cy="1569660"/>
-            </a:xfrm>
-            <a:prstGeom prst="rect">
-              <a:avLst/>
-            </a:prstGeom>
-            <a:noFill/>
-          </p:spPr>
-          <p:txBody>
-            <a:bodyPr wrap="none" rtlCol="0">
-              <a:spAutoFit/>
-            </a:bodyPr>
-            <a:lstStyle/>
-            <a:p>
-              <a:r>
-                <a:rPr lang="en-US" altLang="zh-CN" sz="1200" dirty="0"/>
-                <a:t>It’s not allowed</a:t>
-              </a:r>
-            </a:p>
-            <a:p>
-              <a:r>
-                <a:rPr lang="en-US" altLang="zh-CN" sz="1200" dirty="0"/>
-                <a:t>to place a stone</a:t>
-              </a:r>
-            </a:p>
-            <a:p>
-              <a:r>
-                <a:rPr lang="en-US" altLang="zh-CN" sz="1200" dirty="0"/>
-                <a:t>on some existing</a:t>
-              </a:r>
-            </a:p>
-            <a:p>
-              <a:r>
-                <a:rPr lang="en-US" altLang="zh-CN" sz="1200" dirty="0"/>
-                <a:t>stone.</a:t>
-              </a:r>
-            </a:p>
-            <a:p>
-              <a:endParaRPr lang="en-US" altLang="zh-CN" sz="1200" dirty="0"/>
-            </a:p>
-            <a:p>
-              <a:r>
-                <a:rPr lang="en-US" altLang="zh-CN" sz="1200" dirty="0"/>
-                <a:t>(Also, it’s not allowed</a:t>
-              </a:r>
-            </a:p>
-            <a:p>
-              <a:r>
-                <a:rPr lang="en-US" altLang="zh-CN" sz="1200" dirty="0"/>
-                <a:t>to place any stone</a:t>
-              </a:r>
-            </a:p>
-            <a:p>
-              <a:r>
-                <a:rPr lang="en-US" altLang="zh-CN" sz="1200" dirty="0"/>
-                <a:t>If the game is over)</a:t>
-              </a:r>
-              <a:endParaRPr lang="zh-CN" altLang="en-US" sz="1200" dirty="0"/>
-            </a:p>
-          </p:txBody>
-        </p:sp>
-      </p:grpSp>
-      <p:grpSp>
-        <p:nvGrpSpPr>
-          <p:cNvPr id="1048607" name="组合 1048606">
-            <a:extLst>
-              <a:ext uri="{FF2B5EF4-FFF2-40B4-BE49-F238E27FC236}">
-                <a16:creationId xmlns:a16="http://schemas.microsoft.com/office/drawing/2014/main" id="{F48A5DB4-0802-BCAE-0C24-3E5BF9B71945}"/>
-              </a:ext>
-            </a:extLst>
-          </p:cNvPr>
-          <p:cNvGrpSpPr/>
-          <p:nvPr/>
-        </p:nvGrpSpPr>
-        <p:grpSpPr>
-          <a:xfrm>
-            <a:off x="5551249" y="979941"/>
-            <a:ext cx="4526690" cy="502681"/>
-            <a:chOff x="5551249" y="979941"/>
-            <a:chExt cx="4526690" cy="502681"/>
-          </a:xfrm>
-        </p:grpSpPr>
-        <p:sp>
-          <p:nvSpPr>
-            <p:cNvPr id="1048598" name="左大括号 1048597">
-              <a:extLst>
-                <a:ext uri="{FF2B5EF4-FFF2-40B4-BE49-F238E27FC236}">
-                  <a16:creationId xmlns:a16="http://schemas.microsoft.com/office/drawing/2014/main" id="{A51CA3A6-1860-393B-E3AB-643E0FC6069D}"/>
-                </a:ext>
-              </a:extLst>
-            </p:cNvPr>
-            <p:cNvSpPr/>
-            <p:nvPr/>
-          </p:nvSpPr>
-          <p:spPr>
-            <a:xfrm rot="5400000">
-              <a:off x="7724253" y="-871063"/>
-              <a:ext cx="180681" cy="4526690"/>
-            </a:xfrm>
-            <a:prstGeom prst="leftBrace">
-              <a:avLst/>
-            </a:prstGeom>
-            <a:ln w="19050">
-              <a:solidFill>
-                <a:schemeClr val="tx1"/>
-              </a:solidFill>
-            </a:ln>
-          </p:spPr>
-          <p:style>
-            <a:lnRef idx="1">
-              <a:schemeClr val="accent1"/>
-            </a:lnRef>
-            <a:fillRef idx="0">
-              <a:schemeClr val="accent1"/>
-            </a:fillRef>
-            <a:effectRef idx="0">
-              <a:schemeClr val="accent1"/>
-            </a:effectRef>
-            <a:fontRef idx="minor">
-              <a:schemeClr val="tx1"/>
-            </a:fontRef>
-          </p:style>
-          <p:txBody>
-            <a:bodyPr rtlCol="0" anchor="ctr"/>
-            <a:lstStyle/>
-            <a:p>
-              <a:pPr algn="ctr"/>
-              <a:endParaRPr lang="zh-CN" altLang="en-US"/>
-            </a:p>
-          </p:txBody>
-        </p:sp>
-        <p:sp>
-          <p:nvSpPr>
-            <p:cNvPr id="1048599" name="文本框 1048598">
-              <a:extLst>
-                <a:ext uri="{FF2B5EF4-FFF2-40B4-BE49-F238E27FC236}">
-                  <a16:creationId xmlns:a16="http://schemas.microsoft.com/office/drawing/2014/main" id="{5502319F-D409-98AD-48A5-CED2994B6F62}"/>
-                </a:ext>
-              </a:extLst>
-            </p:cNvPr>
-            <p:cNvSpPr txBox="1"/>
-            <p:nvPr/>
-          </p:nvSpPr>
-          <p:spPr>
-            <a:xfrm>
-              <a:off x="7274490" y="979941"/>
-              <a:ext cx="1243610" cy="369332"/>
-            </a:xfrm>
-            <a:prstGeom prst="rect">
-              <a:avLst/>
-            </a:prstGeom>
-            <a:noFill/>
-          </p:spPr>
-          <p:txBody>
-            <a:bodyPr wrap="none" rtlCol="0">
-              <a:spAutoFit/>
-            </a:bodyPr>
-            <a:lstStyle/>
-            <a:p>
-              <a:r>
-                <a:rPr lang="en-US" altLang="zh-CN" dirty="0"/>
-                <a:t>Game Over</a:t>
-              </a:r>
-              <a:endParaRPr lang="zh-CN" altLang="en-US" dirty="0"/>
-            </a:p>
-          </p:txBody>
-        </p:sp>
-      </p:grpSp>
-      <p:grpSp>
-        <p:nvGrpSpPr>
-          <p:cNvPr id="1048605" name="组合 1048604">
-            <a:extLst>
-              <a:ext uri="{FF2B5EF4-FFF2-40B4-BE49-F238E27FC236}">
-                <a16:creationId xmlns:a16="http://schemas.microsoft.com/office/drawing/2014/main" id="{21CBADEE-E4F7-342F-D923-A9000E41F560}"/>
-              </a:ext>
-            </a:extLst>
-          </p:cNvPr>
-          <p:cNvGrpSpPr/>
-          <p:nvPr/>
-        </p:nvGrpSpPr>
-        <p:grpSpPr>
-          <a:xfrm>
-            <a:off x="843532" y="3894916"/>
-            <a:ext cx="2731249" cy="2486412"/>
-            <a:chOff x="843532" y="3894916"/>
-            <a:chExt cx="2731249" cy="2486412"/>
-          </a:xfrm>
-        </p:grpSpPr>
-        <p:pic>
-          <p:nvPicPr>
-            <p:cNvPr id="1048579" name="图片 1048578">
-              <a:extLst>
-                <a:ext uri="{FF2B5EF4-FFF2-40B4-BE49-F238E27FC236}">
-                  <a16:creationId xmlns:a16="http://schemas.microsoft.com/office/drawing/2014/main" id="{01FCC292-EB54-5245-FE1F-6148C399D4E4}"/>
-                </a:ext>
-              </a:extLst>
-            </p:cNvPr>
-            <p:cNvPicPr>
-              <a:picLocks noChangeAspect="1"/>
-            </p:cNvPicPr>
-            <p:nvPr/>
-          </p:nvPicPr>
-          <p:blipFill>
-            <a:blip r:embed="rId8"/>
-            <a:stretch>
-              <a:fillRect/>
-            </a:stretch>
-          </p:blipFill>
-          <p:spPr>
-            <a:xfrm>
-              <a:off x="1003652" y="4576870"/>
-              <a:ext cx="1417040" cy="1346482"/>
-            </a:xfrm>
-            <a:prstGeom prst="rect">
-              <a:avLst/>
-            </a:prstGeom>
-          </p:spPr>
-        </p:pic>
-        <p:sp>
-          <p:nvSpPr>
-            <p:cNvPr id="1048580" name="箭头: 下 1048579">
-              <a:extLst>
-                <a:ext uri="{FF2B5EF4-FFF2-40B4-BE49-F238E27FC236}">
-                  <a16:creationId xmlns:a16="http://schemas.microsoft.com/office/drawing/2014/main" id="{679CBE24-8758-2A0D-9C56-7F05327844A6}"/>
-                </a:ext>
-              </a:extLst>
-            </p:cNvPr>
-            <p:cNvSpPr/>
-            <p:nvPr/>
-          </p:nvSpPr>
-          <p:spPr>
-            <a:xfrm>
-              <a:off x="1445060" y="4648470"/>
-              <a:ext cx="144016" cy="222719"/>
-            </a:xfrm>
-            <a:prstGeom prst="downArrow">
-              <a:avLst/>
-            </a:prstGeom>
-            <a:solidFill>
-              <a:srgbClr val="FF0000"/>
-            </a:solidFill>
-            <a:ln>
-              <a:solidFill>
-                <a:srgbClr val="C00000"/>
-              </a:solidFill>
-            </a:ln>
-          </p:spPr>
-          <p:style>
-            <a:lnRef idx="2">
-              <a:schemeClr val="accent1">
-                <a:shade val="15000"/>
-              </a:schemeClr>
-            </a:lnRef>
-            <a:fillRef idx="1">
-              <a:schemeClr val="accent1"/>
-            </a:fillRef>
-            <a:effectRef idx="0">
-              <a:schemeClr val="accent1"/>
-            </a:effectRef>
-            <a:fontRef idx="minor">
-              <a:schemeClr val="lt1"/>
-            </a:fontRef>
-          </p:style>
-          <p:txBody>
-            <a:bodyPr rtlCol="0" anchor="ctr"/>
-            <a:lstStyle/>
-            <a:p>
-              <a:pPr algn="ctr"/>
-              <a:endParaRPr lang="zh-CN" altLang="en-US"/>
-            </a:p>
-          </p:txBody>
-        </p:sp>
-        <p:sp>
-          <p:nvSpPr>
-            <p:cNvPr id="1048581" name="箭头: 下 1048580">
-              <a:extLst>
-                <a:ext uri="{FF2B5EF4-FFF2-40B4-BE49-F238E27FC236}">
-                  <a16:creationId xmlns:a16="http://schemas.microsoft.com/office/drawing/2014/main" id="{40BB04CA-8827-1016-F434-D65CDE5C21F5}"/>
-                </a:ext>
-              </a:extLst>
-            </p:cNvPr>
-            <p:cNvSpPr/>
-            <p:nvPr/>
-          </p:nvSpPr>
-          <p:spPr>
-            <a:xfrm rot="2724509">
-              <a:off x="2000671" y="5096896"/>
-              <a:ext cx="144016" cy="222719"/>
-            </a:xfrm>
-            <a:prstGeom prst="downArrow">
-              <a:avLst/>
-            </a:prstGeom>
-            <a:solidFill>
-              <a:srgbClr val="FF0000"/>
-            </a:solidFill>
-            <a:ln>
-              <a:solidFill>
-                <a:srgbClr val="C00000"/>
-              </a:solidFill>
-            </a:ln>
-          </p:spPr>
-          <p:style>
-            <a:lnRef idx="2">
-              <a:schemeClr val="accent1">
-                <a:shade val="15000"/>
-              </a:schemeClr>
-            </a:lnRef>
-            <a:fillRef idx="1">
-              <a:schemeClr val="accent1"/>
-            </a:fillRef>
-            <a:effectRef idx="0">
-              <a:schemeClr val="accent1"/>
-            </a:effectRef>
-            <a:fontRef idx="minor">
-              <a:schemeClr val="lt1"/>
-            </a:fontRef>
-          </p:style>
-          <p:txBody>
-            <a:bodyPr rtlCol="0" anchor="ctr"/>
-            <a:lstStyle/>
-            <a:p>
-              <a:pPr algn="ctr"/>
-              <a:endParaRPr lang="zh-CN" altLang="en-US"/>
-            </a:p>
-          </p:txBody>
-        </p:sp>
-        <p:sp>
-          <p:nvSpPr>
-            <p:cNvPr id="1048582" name="文本框 1048581">
-              <a:extLst>
-                <a:ext uri="{FF2B5EF4-FFF2-40B4-BE49-F238E27FC236}">
-                  <a16:creationId xmlns:a16="http://schemas.microsoft.com/office/drawing/2014/main" id="{2B4C343A-D771-9462-9FBE-650E063CAFBC}"/>
-                </a:ext>
-              </a:extLst>
-            </p:cNvPr>
-            <p:cNvSpPr txBox="1"/>
-            <p:nvPr/>
-          </p:nvSpPr>
-          <p:spPr>
-            <a:xfrm>
-              <a:off x="843532" y="4264707"/>
-              <a:ext cx="1756315" cy="338554"/>
-            </a:xfrm>
-            <a:prstGeom prst="rect">
-              <a:avLst/>
-            </a:prstGeom>
-            <a:noFill/>
-          </p:spPr>
-          <p:txBody>
-            <a:bodyPr wrap="none" rtlCol="0">
-              <a:spAutoFit/>
-            </a:bodyPr>
-            <a:lstStyle/>
-            <a:p>
-              <a:r>
-                <a:rPr lang="en-US" altLang="zh-CN" sz="1600" dirty="0"/>
-                <a:t>Player 1, place first</a:t>
-              </a:r>
-              <a:endParaRPr lang="zh-CN" altLang="en-US" sz="1600" dirty="0"/>
-            </a:p>
-          </p:txBody>
-        </p:sp>
-        <p:sp>
-          <p:nvSpPr>
-            <p:cNvPr id="1048583" name="文本框 1048582">
-              <a:extLst>
-                <a:ext uri="{FF2B5EF4-FFF2-40B4-BE49-F238E27FC236}">
-                  <a16:creationId xmlns:a16="http://schemas.microsoft.com/office/drawing/2014/main" id="{B15994A8-2F81-5EE9-34FA-2F862F80CC0F}"/>
-                </a:ext>
-              </a:extLst>
-            </p:cNvPr>
-            <p:cNvSpPr txBox="1"/>
-            <p:nvPr/>
-          </p:nvSpPr>
-          <p:spPr>
-            <a:xfrm>
-              <a:off x="2219313" y="4755142"/>
-              <a:ext cx="1055802" cy="584775"/>
-            </a:xfrm>
-            <a:prstGeom prst="rect">
-              <a:avLst/>
-            </a:prstGeom>
-            <a:noFill/>
-          </p:spPr>
-          <p:txBody>
-            <a:bodyPr wrap="none" rtlCol="0">
-              <a:spAutoFit/>
-            </a:bodyPr>
-            <a:lstStyle/>
-            <a:p>
-              <a:r>
-                <a:rPr lang="en-US" altLang="zh-CN" sz="1600" dirty="0"/>
-                <a:t>Player 2,</a:t>
-              </a:r>
-            </a:p>
-            <a:p>
-              <a:r>
-                <a:rPr lang="en-US" altLang="zh-CN" sz="1600" dirty="0"/>
-                <a:t>place later</a:t>
-              </a:r>
-              <a:endParaRPr lang="zh-CN" altLang="en-US" sz="1600" dirty="0"/>
-            </a:p>
-          </p:txBody>
-        </p:sp>
-        <p:sp>
-          <p:nvSpPr>
-            <p:cNvPr id="1048584" name="文本框 1048583">
-              <a:extLst>
-                <a:ext uri="{FF2B5EF4-FFF2-40B4-BE49-F238E27FC236}">
-                  <a16:creationId xmlns:a16="http://schemas.microsoft.com/office/drawing/2014/main" id="{71A1B5A5-5883-E1E4-00DF-D60B5F4C0BB7}"/>
-                </a:ext>
-              </a:extLst>
-            </p:cNvPr>
-            <p:cNvSpPr txBox="1"/>
-            <p:nvPr/>
-          </p:nvSpPr>
-          <p:spPr>
-            <a:xfrm>
-              <a:off x="1070344" y="3894916"/>
-              <a:ext cx="1694888" cy="369332"/>
-            </a:xfrm>
-            <a:prstGeom prst="rect">
-              <a:avLst/>
-            </a:prstGeom>
-            <a:noFill/>
-          </p:spPr>
-          <p:txBody>
-            <a:bodyPr wrap="none" rtlCol="0">
-              <a:spAutoFit/>
-            </a:bodyPr>
-            <a:lstStyle/>
-            <a:p>
-              <a:r>
-                <a:rPr lang="en-US" altLang="zh-CN" b="1" dirty="0"/>
-                <a:t>Black Plays First</a:t>
-              </a:r>
-              <a:endParaRPr lang="zh-CN" altLang="en-US" b="1" dirty="0"/>
-            </a:p>
-          </p:txBody>
-        </p:sp>
-        <p:sp>
-          <p:nvSpPr>
-            <p:cNvPr id="1048604" name="文本框 1048603">
-              <a:extLst>
-                <a:ext uri="{FF2B5EF4-FFF2-40B4-BE49-F238E27FC236}">
-                  <a16:creationId xmlns:a16="http://schemas.microsoft.com/office/drawing/2014/main" id="{F79A6BC2-E0D8-42A9-1249-0F5AA01FDDBC}"/>
-                </a:ext>
-              </a:extLst>
-            </p:cNvPr>
-            <p:cNvSpPr txBox="1"/>
-            <p:nvPr/>
-          </p:nvSpPr>
-          <p:spPr>
-            <a:xfrm>
-              <a:off x="911424" y="5734997"/>
-              <a:ext cx="2663357" cy="646331"/>
-            </a:xfrm>
-            <a:prstGeom prst="rect">
-              <a:avLst/>
-            </a:prstGeom>
-            <a:noFill/>
-          </p:spPr>
-          <p:txBody>
-            <a:bodyPr wrap="square" rtlCol="0">
-              <a:spAutoFit/>
-            </a:bodyPr>
-            <a:lstStyle/>
-            <a:p>
-              <a:endParaRPr lang="en-US" altLang="zh-CN" sz="1200" dirty="0"/>
-            </a:p>
-            <a:p>
-              <a:r>
-                <a:rPr lang="en-US" altLang="zh-CN" sz="1200" dirty="0"/>
-                <a:t>(and the stones should be placed on the intersection of the lines of the board)</a:t>
-              </a:r>
-              <a:endParaRPr lang="zh-CN" altLang="en-US" sz="1200" dirty="0"/>
-            </a:p>
-          </p:txBody>
-        </p:sp>
-      </p:grpSp>
-    </p:spTree>
-    <p:extLst>
-      <p:ext uri="{BB962C8B-B14F-4D97-AF65-F5344CB8AC3E}">
-        <p14:creationId xmlns:p14="http://schemas.microsoft.com/office/powerpoint/2010/main" val="2776878083"/>
-      </p:ext>
-    </p:extLst>
-  </p:cSld>
-  <p:clrMapOvr>
-    <a:masterClrMapping/>
-  </p:clrMapOvr>
-</p:sld>
-</file>
-
-<file path=ppt/slides/slide3.xml><?xml version="1.0" encoding="utf-8"?>
 <p:sld xmlns:a="http://schemas.openxmlformats.org/drawingml/2006/main" xmlns:r="http://schemas.openxmlformats.org/officeDocument/2006/relationships" xmlns:p="http://schemas.openxmlformats.org/presentationml/2006/main">
   <p:cSld>
     <p:spTree>
@@ -6632,6 +4312,463 @@
 </p:sld>
 </file>
 
+<file path=ppt/slides/slide3.xml><?xml version="1.0" encoding="utf-8"?>
+<p:sld xmlns:a="http://schemas.openxmlformats.org/drawingml/2006/main" xmlns:r="http://schemas.openxmlformats.org/officeDocument/2006/relationships" xmlns:p="http://schemas.openxmlformats.org/presentationml/2006/main">
+  <p:cSld>
+    <p:spTree>
+      <p:nvGrpSpPr>
+        <p:cNvPr id="1" name="">
+          <a:extLst>
+            <a:ext uri="{FF2B5EF4-FFF2-40B4-BE49-F238E27FC236}">
+              <a16:creationId xmlns:a16="http://schemas.microsoft.com/office/drawing/2014/main" id="{2E2939C9-F02B-53AC-9919-4B60AEBC07E8}"/>
+            </a:ext>
+          </a:extLst>
+        </p:cNvPr>
+        <p:cNvGrpSpPr/>
+        <p:nvPr/>
+      </p:nvGrpSpPr>
+      <p:grpSpPr>
+        <a:xfrm>
+          <a:off x="0" y="0"/>
+          <a:ext cx="0" cy="0"/>
+          <a:chOff x="0" y="0"/>
+          <a:chExt cx="0" cy="0"/>
+        </a:xfrm>
+      </p:grpSpPr>
+      <p:sp>
+        <p:nvSpPr>
+          <p:cNvPr id="1048589" name="标题 4">
+            <a:extLst>
+              <a:ext uri="{FF2B5EF4-FFF2-40B4-BE49-F238E27FC236}">
+                <a16:creationId xmlns:a16="http://schemas.microsoft.com/office/drawing/2014/main" id="{2C88CEAC-39AA-AD98-6152-3AB69DBC25D1}"/>
+              </a:ext>
+            </a:extLst>
+          </p:cNvPr>
+          <p:cNvSpPr>
+            <a:spLocks noGrp="1"/>
+          </p:cNvSpPr>
+          <p:nvPr>
+            <p:ph type="title"/>
+          </p:nvPr>
+        </p:nvSpPr>
+        <p:spPr>
+          <a:xfrm>
+            <a:off x="191344" y="71541"/>
+            <a:ext cx="7884064" cy="835874"/>
+          </a:xfrm>
+        </p:spPr>
+        <p:txBody>
+          <a:bodyPr>
+            <a:noAutofit/>
+          </a:bodyPr>
+          <a:lstStyle/>
+          <a:p>
+            <a:r>
+              <a:rPr lang="en-US" altLang="zh-CN" sz="3200" dirty="0"/>
+              <a:t>Lambda Expression</a:t>
+            </a:r>
+            <a:endParaRPr lang="zh-CN" sz="3200" dirty="0"/>
+          </a:p>
+        </p:txBody>
+      </p:sp>
+      <p:sp>
+        <p:nvSpPr>
+          <p:cNvPr id="1048583" name="文本框 1048582">
+            <a:extLst>
+              <a:ext uri="{FF2B5EF4-FFF2-40B4-BE49-F238E27FC236}">
+                <a16:creationId xmlns:a16="http://schemas.microsoft.com/office/drawing/2014/main" id="{CFBA47D1-EE41-FCDB-720B-4C38F2959FB6}"/>
+              </a:ext>
+            </a:extLst>
+          </p:cNvPr>
+          <p:cNvSpPr txBox="1"/>
+          <p:nvPr/>
+        </p:nvSpPr>
+        <p:spPr>
+          <a:xfrm>
+            <a:off x="4655840" y="304812"/>
+            <a:ext cx="1469826" cy="369332"/>
+          </a:xfrm>
+          <a:prstGeom prst="rect">
+            <a:avLst/>
+          </a:prstGeom>
+          <a:noFill/>
+        </p:spPr>
+        <p:txBody>
+          <a:bodyPr wrap="none" rtlCol="0">
+            <a:spAutoFit/>
+          </a:bodyPr>
+          <a:lstStyle/>
+          <a:p>
+            <a:r>
+              <a:rPr lang="en-US" altLang="zh-CN" dirty="0">
+                <a:solidFill>
+                  <a:schemeClr val="bg1"/>
+                </a:solidFill>
+              </a:rPr>
+              <a:t>A brief glance</a:t>
+            </a:r>
+            <a:endParaRPr lang="zh-CN" altLang="en-US" dirty="0">
+              <a:solidFill>
+                <a:schemeClr val="bg1"/>
+              </a:solidFill>
+            </a:endParaRPr>
+          </a:p>
+        </p:txBody>
+      </p:sp>
+      <p:pic>
+        <p:nvPicPr>
+          <p:cNvPr id="1048591" name="图片 1048590">
+            <a:extLst>
+              <a:ext uri="{FF2B5EF4-FFF2-40B4-BE49-F238E27FC236}">
+                <a16:creationId xmlns:a16="http://schemas.microsoft.com/office/drawing/2014/main" id="{4A4477D4-EA19-146C-3F30-9D9F6FC07B3E}"/>
+              </a:ext>
+            </a:extLst>
+          </p:cNvPr>
+          <p:cNvPicPr>
+            <a:picLocks noChangeAspect="1"/>
+          </p:cNvPicPr>
+          <p:nvPr/>
+        </p:nvPicPr>
+        <p:blipFill>
+          <a:blip r:embed="rId2"/>
+          <a:stretch>
+            <a:fillRect/>
+          </a:stretch>
+        </p:blipFill>
+        <p:spPr>
+          <a:xfrm>
+            <a:off x="275222" y="1318456"/>
+            <a:ext cx="4647473" cy="5062872"/>
+          </a:xfrm>
+          <a:prstGeom prst="rect">
+            <a:avLst/>
+          </a:prstGeom>
+        </p:spPr>
+      </p:pic>
+      <p:pic>
+        <p:nvPicPr>
+          <p:cNvPr id="1048594" name="图片 1048593">
+            <a:extLst>
+              <a:ext uri="{FF2B5EF4-FFF2-40B4-BE49-F238E27FC236}">
+                <a16:creationId xmlns:a16="http://schemas.microsoft.com/office/drawing/2014/main" id="{75454445-A2E3-F937-BCF8-556C243B3157}"/>
+              </a:ext>
+            </a:extLst>
+          </p:cNvPr>
+          <p:cNvPicPr>
+            <a:picLocks noChangeAspect="1"/>
+          </p:cNvPicPr>
+          <p:nvPr/>
+        </p:nvPicPr>
+        <p:blipFill>
+          <a:blip r:embed="rId3"/>
+          <a:stretch>
+            <a:fillRect/>
+          </a:stretch>
+        </p:blipFill>
+        <p:spPr>
+          <a:xfrm>
+            <a:off x="5147232" y="1916258"/>
+            <a:ext cx="2232248" cy="1104313"/>
+          </a:xfrm>
+          <a:prstGeom prst="rect">
+            <a:avLst/>
+          </a:prstGeom>
+        </p:spPr>
+      </p:pic>
+      <p:sp>
+        <p:nvSpPr>
+          <p:cNvPr id="1048597" name="文本框 1048596">
+            <a:extLst>
+              <a:ext uri="{FF2B5EF4-FFF2-40B4-BE49-F238E27FC236}">
+                <a16:creationId xmlns:a16="http://schemas.microsoft.com/office/drawing/2014/main" id="{54E47C41-D63E-9144-BA5E-293C34A91A9D}"/>
+              </a:ext>
+            </a:extLst>
+          </p:cNvPr>
+          <p:cNvSpPr txBox="1"/>
+          <p:nvPr/>
+        </p:nvSpPr>
+        <p:spPr>
+          <a:xfrm>
+            <a:off x="5183485" y="1273736"/>
+            <a:ext cx="1884361" cy="523220"/>
+          </a:xfrm>
+          <a:prstGeom prst="rect">
+            <a:avLst/>
+          </a:prstGeom>
+          <a:noFill/>
+        </p:spPr>
+        <p:txBody>
+          <a:bodyPr wrap="square" rtlCol="0">
+            <a:spAutoFit/>
+          </a:bodyPr>
+          <a:lstStyle/>
+          <a:p>
+            <a:r>
+              <a:rPr lang="en-US" altLang="zh-CN" sz="1400" dirty="0"/>
+              <a:t>Output after running the code</a:t>
+            </a:r>
+            <a:endParaRPr lang="zh-CN" altLang="en-US" sz="1400" dirty="0"/>
+          </a:p>
+        </p:txBody>
+      </p:sp>
+      <p:sp>
+        <p:nvSpPr>
+          <p:cNvPr id="1048599" name="文本框 1048598">
+            <a:extLst>
+              <a:ext uri="{FF2B5EF4-FFF2-40B4-BE49-F238E27FC236}">
+                <a16:creationId xmlns:a16="http://schemas.microsoft.com/office/drawing/2014/main" id="{1DB881A8-E181-A317-166E-67223F61D3B6}"/>
+              </a:ext>
+            </a:extLst>
+          </p:cNvPr>
+          <p:cNvSpPr txBox="1"/>
+          <p:nvPr/>
+        </p:nvSpPr>
+        <p:spPr>
+          <a:xfrm>
+            <a:off x="5123816" y="3284984"/>
+            <a:ext cx="6264696" cy="3008772"/>
+          </a:xfrm>
+          <a:prstGeom prst="rect">
+            <a:avLst/>
+          </a:prstGeom>
+          <a:noFill/>
+        </p:spPr>
+        <p:txBody>
+          <a:bodyPr wrap="square" rtlCol="0">
+            <a:spAutoFit/>
+          </a:bodyPr>
+          <a:lstStyle/>
+          <a:p>
+            <a:pPr marL="285750" indent="-285750">
+              <a:lnSpc>
+                <a:spcPct val="150000"/>
+              </a:lnSpc>
+              <a:buFont typeface="Arial" panose="020B0604020202020204" pitchFamily="34" charset="0"/>
+              <a:buChar char="•"/>
+            </a:pPr>
+            <a:r>
+              <a:rPr lang="en-US" altLang="zh-CN" sz="1600" dirty="0"/>
+              <a:t>Lambda expression is some </a:t>
+            </a:r>
+            <a:r>
+              <a:rPr lang="en-US" altLang="zh-CN" sz="1600" dirty="0">
+                <a:solidFill>
+                  <a:srgbClr val="525252"/>
+                </a:solidFill>
+                <a:latin typeface="Segoe UI" panose="020B0502040204020203" pitchFamily="34" charset="0"/>
+              </a:rPr>
+              <a:t>s</a:t>
+            </a:r>
+            <a:r>
+              <a:rPr lang="en-US" altLang="zh-CN" sz="1600" b="0" i="0" dirty="0">
+                <a:solidFill>
+                  <a:srgbClr val="525252"/>
+                </a:solidFill>
+                <a:effectLst/>
+                <a:latin typeface="Segoe UI" panose="020B0502040204020203" pitchFamily="34" charset="0"/>
+              </a:rPr>
+              <a:t>yntactic sugar for anonymous initialization of some </a:t>
+            </a:r>
+            <a:r>
+              <a:rPr lang="en-US" altLang="zh-CN" sz="1600" dirty="0">
+                <a:solidFill>
+                  <a:srgbClr val="525252"/>
+                </a:solidFill>
+                <a:latin typeface="Segoe UI" panose="020B0502040204020203" pitchFamily="34" charset="0"/>
+              </a:rPr>
+              <a:t>functional interface implementation</a:t>
+            </a:r>
+          </a:p>
+          <a:p>
+            <a:pPr marL="285750" indent="-285750">
+              <a:lnSpc>
+                <a:spcPct val="150000"/>
+              </a:lnSpc>
+              <a:buFont typeface="Arial" panose="020B0604020202020204" pitchFamily="34" charset="0"/>
+              <a:buChar char="•"/>
+            </a:pPr>
+            <a:r>
+              <a:rPr lang="en-US" altLang="zh-CN" sz="1600" dirty="0">
+                <a:solidFill>
+                  <a:srgbClr val="525252"/>
+                </a:solidFill>
+                <a:latin typeface="Segoe UI" panose="020B0502040204020203" pitchFamily="34" charset="0"/>
+              </a:rPr>
+              <a:t>A functional interface should be of one and only one abstract method</a:t>
+            </a:r>
+          </a:p>
+          <a:p>
+            <a:pPr marL="285750" indent="-285750">
+              <a:lnSpc>
+                <a:spcPct val="150000"/>
+              </a:lnSpc>
+              <a:buFont typeface="Arial" panose="020B0604020202020204" pitchFamily="34" charset="0"/>
+              <a:buChar char="•"/>
+            </a:pPr>
+            <a:r>
+              <a:rPr lang="en-US" altLang="zh-CN" sz="1600" dirty="0"/>
+              <a:t>The type of the target class and the type(s) of the argument(s) for the only overridden function is inferred from the context</a:t>
+            </a:r>
+          </a:p>
+          <a:p>
+            <a:pPr marL="285750" indent="-285750">
+              <a:lnSpc>
+                <a:spcPct val="150000"/>
+              </a:lnSpc>
+              <a:buFont typeface="Arial" panose="020B0604020202020204" pitchFamily="34" charset="0"/>
+              <a:buChar char="•"/>
+            </a:pPr>
+            <a:r>
+              <a:rPr lang="en-US" altLang="zh-CN" sz="1600" dirty="0"/>
+              <a:t>Such context could be the </a:t>
+            </a:r>
+            <a:r>
+              <a:rPr lang="en-US" altLang="zh-CN" sz="1600" dirty="0" err="1"/>
+              <a:t>lvalue</a:t>
+            </a:r>
+            <a:r>
+              <a:rPr lang="en-US" altLang="zh-CN" sz="1600" dirty="0"/>
+              <a:t> or the function call, without ambiguity.</a:t>
+            </a:r>
+            <a:endParaRPr lang="zh-CN" altLang="en-US" sz="1600" dirty="0"/>
+          </a:p>
+        </p:txBody>
+      </p:sp>
+      <p:sp>
+        <p:nvSpPr>
+          <p:cNvPr id="1048600" name="文本框 1048599">
+            <a:extLst>
+              <a:ext uri="{FF2B5EF4-FFF2-40B4-BE49-F238E27FC236}">
+                <a16:creationId xmlns:a16="http://schemas.microsoft.com/office/drawing/2014/main" id="{80F6231F-96C5-04DC-BBC6-9F8043B22B5D}"/>
+              </a:ext>
+            </a:extLst>
+          </p:cNvPr>
+          <p:cNvSpPr txBox="1"/>
+          <p:nvPr/>
+        </p:nvSpPr>
+        <p:spPr>
+          <a:xfrm>
+            <a:off x="7824192" y="1124744"/>
+            <a:ext cx="4006287" cy="276999"/>
+          </a:xfrm>
+          <a:prstGeom prst="rect">
+            <a:avLst/>
+          </a:prstGeom>
+          <a:noFill/>
+        </p:spPr>
+        <p:txBody>
+          <a:bodyPr wrap="square" rtlCol="0">
+            <a:spAutoFit/>
+          </a:bodyPr>
+          <a:lstStyle/>
+          <a:p>
+            <a:r>
+              <a:rPr lang="en-US" altLang="zh-CN" sz="1200" i="1" dirty="0">
+                <a:solidFill>
+                  <a:schemeClr val="bg1">
+                    <a:lumMod val="50000"/>
+                  </a:schemeClr>
+                </a:solidFill>
+              </a:rPr>
+              <a:t>A small task: try to rewrite project 1 using lambda expression?</a:t>
+            </a:r>
+            <a:endParaRPr lang="zh-CN" altLang="en-US" sz="1200" i="1" dirty="0">
+              <a:solidFill>
+                <a:schemeClr val="bg1">
+                  <a:lumMod val="50000"/>
+                </a:schemeClr>
+              </a:solidFill>
+            </a:endParaRPr>
+          </a:p>
+        </p:txBody>
+      </p:sp>
+      <p:pic>
+        <p:nvPicPr>
+          <p:cNvPr id="1048602" name="图片 1048601">
+            <a:extLst>
+              <a:ext uri="{FF2B5EF4-FFF2-40B4-BE49-F238E27FC236}">
+                <a16:creationId xmlns:a16="http://schemas.microsoft.com/office/drawing/2014/main" id="{6D48C2E3-4A7F-AEA7-EAD4-53115AF5EFC7}"/>
+              </a:ext>
+            </a:extLst>
+          </p:cNvPr>
+          <p:cNvPicPr>
+            <a:picLocks noChangeAspect="1"/>
+          </p:cNvPicPr>
+          <p:nvPr/>
+        </p:nvPicPr>
+        <p:blipFill>
+          <a:blip r:embed="rId4"/>
+          <a:stretch>
+            <a:fillRect/>
+          </a:stretch>
+        </p:blipFill>
+        <p:spPr>
+          <a:xfrm>
+            <a:off x="7675749" y="1468600"/>
+            <a:ext cx="1834362" cy="1692803"/>
+          </a:xfrm>
+          <a:prstGeom prst="rect">
+            <a:avLst/>
+          </a:prstGeom>
+          <a:effectLst>
+            <a:outerShdw blurRad="50800" dist="38100" dir="2700000" algn="tl" rotWithShape="0">
+              <a:prstClr val="black">
+                <a:alpha val="40000"/>
+              </a:prstClr>
+            </a:outerShdw>
+          </a:effectLst>
+        </p:spPr>
+      </p:pic>
+      <p:pic>
+        <p:nvPicPr>
+          <p:cNvPr id="1048604" name="图片 1048603">
+            <a:extLst>
+              <a:ext uri="{FF2B5EF4-FFF2-40B4-BE49-F238E27FC236}">
+                <a16:creationId xmlns:a16="http://schemas.microsoft.com/office/drawing/2014/main" id="{6B96F6F5-E428-64A2-E2CC-75877FDA3CA1}"/>
+              </a:ext>
+            </a:extLst>
+          </p:cNvPr>
+          <p:cNvPicPr>
+            <a:picLocks noChangeAspect="1"/>
+          </p:cNvPicPr>
+          <p:nvPr/>
+        </p:nvPicPr>
+        <p:blipFill>
+          <a:blip r:embed="rId5"/>
+          <a:stretch>
+            <a:fillRect/>
+          </a:stretch>
+        </p:blipFill>
+        <p:spPr>
+          <a:xfrm>
+            <a:off x="9821745" y="1484784"/>
+            <a:ext cx="2195064" cy="1692803"/>
+          </a:xfrm>
+          <a:prstGeom prst="rect">
+            <a:avLst/>
+          </a:prstGeom>
+          <a:effectLst>
+            <a:outerShdw blurRad="50800" dist="38100" dir="2700000" algn="tl" rotWithShape="0">
+              <a:prstClr val="black">
+                <a:alpha val="40000"/>
+              </a:prstClr>
+            </a:outerShdw>
+          </a:effectLst>
+        </p:spPr>
+      </p:pic>
+    </p:spTree>
+    <p:extLst>
+      <p:ext uri="{BB962C8B-B14F-4D97-AF65-F5344CB8AC3E}">
+        <p14:creationId xmlns:p14="http://schemas.microsoft.com/office/powerpoint/2010/main" val="63474200"/>
+      </p:ext>
+    </p:extLst>
+  </p:cSld>
+  <p:clrMapOvr>
+    <a:masterClrMapping/>
+  </p:clrMapOvr>
+</p:sld>
+</file>
+
 <file path=ppt/slides/slide4.xml><?xml version="1.0" encoding="utf-8"?>
 <p:sld xmlns:a="http://schemas.openxmlformats.org/drawingml/2006/main" xmlns:r="http://schemas.openxmlformats.org/officeDocument/2006/relationships" xmlns:p="http://schemas.openxmlformats.org/presentationml/2006/main">
   <p:cSld>
@@ -6691,463 +4828,6 @@
           </a:p>
         </p:txBody>
       </p:sp>
-      <p:sp>
-        <p:nvSpPr>
-          <p:cNvPr id="1048583" name="文本框 1048582">
-            <a:extLst>
-              <a:ext uri="{FF2B5EF4-FFF2-40B4-BE49-F238E27FC236}">
-                <a16:creationId xmlns:a16="http://schemas.microsoft.com/office/drawing/2014/main" id="{CFBA47D1-EE41-FCDB-720B-4C38F2959FB6}"/>
-              </a:ext>
-            </a:extLst>
-          </p:cNvPr>
-          <p:cNvSpPr txBox="1"/>
-          <p:nvPr/>
-        </p:nvSpPr>
-        <p:spPr>
-          <a:xfrm>
-            <a:off x="4655840" y="304812"/>
-            <a:ext cx="1469826" cy="369332"/>
-          </a:xfrm>
-          <a:prstGeom prst="rect">
-            <a:avLst/>
-          </a:prstGeom>
-          <a:noFill/>
-        </p:spPr>
-        <p:txBody>
-          <a:bodyPr wrap="none" rtlCol="0">
-            <a:spAutoFit/>
-          </a:bodyPr>
-          <a:lstStyle/>
-          <a:p>
-            <a:r>
-              <a:rPr lang="en-US" altLang="zh-CN" dirty="0">
-                <a:solidFill>
-                  <a:schemeClr val="bg1"/>
-                </a:solidFill>
-              </a:rPr>
-              <a:t>A brief glance</a:t>
-            </a:r>
-            <a:endParaRPr lang="zh-CN" altLang="en-US" dirty="0">
-              <a:solidFill>
-                <a:schemeClr val="bg1"/>
-              </a:solidFill>
-            </a:endParaRPr>
-          </a:p>
-        </p:txBody>
-      </p:sp>
-      <p:pic>
-        <p:nvPicPr>
-          <p:cNvPr id="1048591" name="图片 1048590">
-            <a:extLst>
-              <a:ext uri="{FF2B5EF4-FFF2-40B4-BE49-F238E27FC236}">
-                <a16:creationId xmlns:a16="http://schemas.microsoft.com/office/drawing/2014/main" id="{4A4477D4-EA19-146C-3F30-9D9F6FC07B3E}"/>
-              </a:ext>
-            </a:extLst>
-          </p:cNvPr>
-          <p:cNvPicPr>
-            <a:picLocks noChangeAspect="1"/>
-          </p:cNvPicPr>
-          <p:nvPr/>
-        </p:nvPicPr>
-        <p:blipFill>
-          <a:blip r:embed="rId2"/>
-          <a:stretch>
-            <a:fillRect/>
-          </a:stretch>
-        </p:blipFill>
-        <p:spPr>
-          <a:xfrm>
-            <a:off x="275222" y="1318456"/>
-            <a:ext cx="4647473" cy="5062872"/>
-          </a:xfrm>
-          <a:prstGeom prst="rect">
-            <a:avLst/>
-          </a:prstGeom>
-        </p:spPr>
-      </p:pic>
-      <p:pic>
-        <p:nvPicPr>
-          <p:cNvPr id="1048594" name="图片 1048593">
-            <a:extLst>
-              <a:ext uri="{FF2B5EF4-FFF2-40B4-BE49-F238E27FC236}">
-                <a16:creationId xmlns:a16="http://schemas.microsoft.com/office/drawing/2014/main" id="{75454445-A2E3-F937-BCF8-556C243B3157}"/>
-              </a:ext>
-            </a:extLst>
-          </p:cNvPr>
-          <p:cNvPicPr>
-            <a:picLocks noChangeAspect="1"/>
-          </p:cNvPicPr>
-          <p:nvPr/>
-        </p:nvPicPr>
-        <p:blipFill>
-          <a:blip r:embed="rId3"/>
-          <a:stretch>
-            <a:fillRect/>
-          </a:stretch>
-        </p:blipFill>
-        <p:spPr>
-          <a:xfrm>
-            <a:off x="5147232" y="1916258"/>
-            <a:ext cx="2232248" cy="1104313"/>
-          </a:xfrm>
-          <a:prstGeom prst="rect">
-            <a:avLst/>
-          </a:prstGeom>
-        </p:spPr>
-      </p:pic>
-      <p:sp>
-        <p:nvSpPr>
-          <p:cNvPr id="1048597" name="文本框 1048596">
-            <a:extLst>
-              <a:ext uri="{FF2B5EF4-FFF2-40B4-BE49-F238E27FC236}">
-                <a16:creationId xmlns:a16="http://schemas.microsoft.com/office/drawing/2014/main" id="{54E47C41-D63E-9144-BA5E-293C34A91A9D}"/>
-              </a:ext>
-            </a:extLst>
-          </p:cNvPr>
-          <p:cNvSpPr txBox="1"/>
-          <p:nvPr/>
-        </p:nvSpPr>
-        <p:spPr>
-          <a:xfrm>
-            <a:off x="5183485" y="1273736"/>
-            <a:ext cx="1884361" cy="523220"/>
-          </a:xfrm>
-          <a:prstGeom prst="rect">
-            <a:avLst/>
-          </a:prstGeom>
-          <a:noFill/>
-        </p:spPr>
-        <p:txBody>
-          <a:bodyPr wrap="square" rtlCol="0">
-            <a:spAutoFit/>
-          </a:bodyPr>
-          <a:lstStyle/>
-          <a:p>
-            <a:r>
-              <a:rPr lang="en-US" altLang="zh-CN" sz="1400" dirty="0"/>
-              <a:t>Output after running the code</a:t>
-            </a:r>
-            <a:endParaRPr lang="zh-CN" altLang="en-US" sz="1400" dirty="0"/>
-          </a:p>
-        </p:txBody>
-      </p:sp>
-      <p:sp>
-        <p:nvSpPr>
-          <p:cNvPr id="1048599" name="文本框 1048598">
-            <a:extLst>
-              <a:ext uri="{FF2B5EF4-FFF2-40B4-BE49-F238E27FC236}">
-                <a16:creationId xmlns:a16="http://schemas.microsoft.com/office/drawing/2014/main" id="{1DB881A8-E181-A317-166E-67223F61D3B6}"/>
-              </a:ext>
-            </a:extLst>
-          </p:cNvPr>
-          <p:cNvSpPr txBox="1"/>
-          <p:nvPr/>
-        </p:nvSpPr>
-        <p:spPr>
-          <a:xfrm>
-            <a:off x="5123816" y="3284984"/>
-            <a:ext cx="6264696" cy="3008772"/>
-          </a:xfrm>
-          <a:prstGeom prst="rect">
-            <a:avLst/>
-          </a:prstGeom>
-          <a:noFill/>
-        </p:spPr>
-        <p:txBody>
-          <a:bodyPr wrap="square" rtlCol="0">
-            <a:spAutoFit/>
-          </a:bodyPr>
-          <a:lstStyle/>
-          <a:p>
-            <a:pPr marL="285750" indent="-285750">
-              <a:lnSpc>
-                <a:spcPct val="150000"/>
-              </a:lnSpc>
-              <a:buFont typeface="Arial" panose="020B0604020202020204" pitchFamily="34" charset="0"/>
-              <a:buChar char="•"/>
-            </a:pPr>
-            <a:r>
-              <a:rPr lang="en-US" altLang="zh-CN" sz="1600" dirty="0"/>
-              <a:t>Lambda expression is some </a:t>
-            </a:r>
-            <a:r>
-              <a:rPr lang="en-US" altLang="zh-CN" sz="1600" dirty="0">
-                <a:solidFill>
-                  <a:srgbClr val="525252"/>
-                </a:solidFill>
-                <a:latin typeface="Segoe UI" panose="020B0502040204020203" pitchFamily="34" charset="0"/>
-              </a:rPr>
-              <a:t>s</a:t>
-            </a:r>
-            <a:r>
-              <a:rPr lang="en-US" altLang="zh-CN" sz="1600" b="0" i="0" dirty="0">
-                <a:solidFill>
-                  <a:srgbClr val="525252"/>
-                </a:solidFill>
-                <a:effectLst/>
-                <a:latin typeface="Segoe UI" panose="020B0502040204020203" pitchFamily="34" charset="0"/>
-              </a:rPr>
-              <a:t>yntactic sugar for anonymous initialization of some </a:t>
-            </a:r>
-            <a:r>
-              <a:rPr lang="en-US" altLang="zh-CN" sz="1600" dirty="0">
-                <a:solidFill>
-                  <a:srgbClr val="525252"/>
-                </a:solidFill>
-                <a:latin typeface="Segoe UI" panose="020B0502040204020203" pitchFamily="34" charset="0"/>
-              </a:rPr>
-              <a:t>functional interface implementation</a:t>
-            </a:r>
-          </a:p>
-          <a:p>
-            <a:pPr marL="285750" indent="-285750">
-              <a:lnSpc>
-                <a:spcPct val="150000"/>
-              </a:lnSpc>
-              <a:buFont typeface="Arial" panose="020B0604020202020204" pitchFamily="34" charset="0"/>
-              <a:buChar char="•"/>
-            </a:pPr>
-            <a:r>
-              <a:rPr lang="en-US" altLang="zh-CN" sz="1600" dirty="0">
-                <a:solidFill>
-                  <a:srgbClr val="525252"/>
-                </a:solidFill>
-                <a:latin typeface="Segoe UI" panose="020B0502040204020203" pitchFamily="34" charset="0"/>
-              </a:rPr>
-              <a:t>A functional interface should be of one and only one abstract method</a:t>
-            </a:r>
-          </a:p>
-          <a:p>
-            <a:pPr marL="285750" indent="-285750">
-              <a:lnSpc>
-                <a:spcPct val="150000"/>
-              </a:lnSpc>
-              <a:buFont typeface="Arial" panose="020B0604020202020204" pitchFamily="34" charset="0"/>
-              <a:buChar char="•"/>
-            </a:pPr>
-            <a:r>
-              <a:rPr lang="en-US" altLang="zh-CN" sz="1600" dirty="0"/>
-              <a:t>The type of the target class and the type(s) of the argument(s) for the only overridden function is inferred from the context</a:t>
-            </a:r>
-          </a:p>
-          <a:p>
-            <a:pPr marL="285750" indent="-285750">
-              <a:lnSpc>
-                <a:spcPct val="150000"/>
-              </a:lnSpc>
-              <a:buFont typeface="Arial" panose="020B0604020202020204" pitchFamily="34" charset="0"/>
-              <a:buChar char="•"/>
-            </a:pPr>
-            <a:r>
-              <a:rPr lang="en-US" altLang="zh-CN" sz="1600" dirty="0"/>
-              <a:t>Such context could be the </a:t>
-            </a:r>
-            <a:r>
-              <a:rPr lang="en-US" altLang="zh-CN" sz="1600" dirty="0" err="1"/>
-              <a:t>lvalue</a:t>
-            </a:r>
-            <a:r>
-              <a:rPr lang="en-US" altLang="zh-CN" sz="1600" dirty="0"/>
-              <a:t> or the function call, without ambiguity.</a:t>
-            </a:r>
-            <a:endParaRPr lang="zh-CN" altLang="en-US" sz="1600" dirty="0"/>
-          </a:p>
-        </p:txBody>
-      </p:sp>
-      <p:sp>
-        <p:nvSpPr>
-          <p:cNvPr id="1048600" name="文本框 1048599">
-            <a:extLst>
-              <a:ext uri="{FF2B5EF4-FFF2-40B4-BE49-F238E27FC236}">
-                <a16:creationId xmlns:a16="http://schemas.microsoft.com/office/drawing/2014/main" id="{80F6231F-96C5-04DC-BBC6-9F8043B22B5D}"/>
-              </a:ext>
-            </a:extLst>
-          </p:cNvPr>
-          <p:cNvSpPr txBox="1"/>
-          <p:nvPr/>
-        </p:nvSpPr>
-        <p:spPr>
-          <a:xfrm>
-            <a:off x="7824192" y="1124744"/>
-            <a:ext cx="4006287" cy="276999"/>
-          </a:xfrm>
-          <a:prstGeom prst="rect">
-            <a:avLst/>
-          </a:prstGeom>
-          <a:noFill/>
-        </p:spPr>
-        <p:txBody>
-          <a:bodyPr wrap="square" rtlCol="0">
-            <a:spAutoFit/>
-          </a:bodyPr>
-          <a:lstStyle/>
-          <a:p>
-            <a:r>
-              <a:rPr lang="en-US" altLang="zh-CN" sz="1200" i="1" dirty="0">
-                <a:solidFill>
-                  <a:schemeClr val="bg1">
-                    <a:lumMod val="50000"/>
-                  </a:schemeClr>
-                </a:solidFill>
-              </a:rPr>
-              <a:t>A small task: try to rewrite project 1 using lambda expression?</a:t>
-            </a:r>
-            <a:endParaRPr lang="zh-CN" altLang="en-US" sz="1200" i="1" dirty="0">
-              <a:solidFill>
-                <a:schemeClr val="bg1">
-                  <a:lumMod val="50000"/>
-                </a:schemeClr>
-              </a:solidFill>
-            </a:endParaRPr>
-          </a:p>
-        </p:txBody>
-      </p:sp>
-      <p:pic>
-        <p:nvPicPr>
-          <p:cNvPr id="1048602" name="图片 1048601">
-            <a:extLst>
-              <a:ext uri="{FF2B5EF4-FFF2-40B4-BE49-F238E27FC236}">
-                <a16:creationId xmlns:a16="http://schemas.microsoft.com/office/drawing/2014/main" id="{6D48C2E3-4A7F-AEA7-EAD4-53115AF5EFC7}"/>
-              </a:ext>
-            </a:extLst>
-          </p:cNvPr>
-          <p:cNvPicPr>
-            <a:picLocks noChangeAspect="1"/>
-          </p:cNvPicPr>
-          <p:nvPr/>
-        </p:nvPicPr>
-        <p:blipFill>
-          <a:blip r:embed="rId4"/>
-          <a:stretch>
-            <a:fillRect/>
-          </a:stretch>
-        </p:blipFill>
-        <p:spPr>
-          <a:xfrm>
-            <a:off x="7675749" y="1468600"/>
-            <a:ext cx="1834362" cy="1692803"/>
-          </a:xfrm>
-          <a:prstGeom prst="rect">
-            <a:avLst/>
-          </a:prstGeom>
-          <a:effectLst>
-            <a:outerShdw blurRad="50800" dist="38100" dir="2700000" algn="tl" rotWithShape="0">
-              <a:prstClr val="black">
-                <a:alpha val="40000"/>
-              </a:prstClr>
-            </a:outerShdw>
-          </a:effectLst>
-        </p:spPr>
-      </p:pic>
-      <p:pic>
-        <p:nvPicPr>
-          <p:cNvPr id="1048604" name="图片 1048603">
-            <a:extLst>
-              <a:ext uri="{FF2B5EF4-FFF2-40B4-BE49-F238E27FC236}">
-                <a16:creationId xmlns:a16="http://schemas.microsoft.com/office/drawing/2014/main" id="{6B96F6F5-E428-64A2-E2CC-75877FDA3CA1}"/>
-              </a:ext>
-            </a:extLst>
-          </p:cNvPr>
-          <p:cNvPicPr>
-            <a:picLocks noChangeAspect="1"/>
-          </p:cNvPicPr>
-          <p:nvPr/>
-        </p:nvPicPr>
-        <p:blipFill>
-          <a:blip r:embed="rId5"/>
-          <a:stretch>
-            <a:fillRect/>
-          </a:stretch>
-        </p:blipFill>
-        <p:spPr>
-          <a:xfrm>
-            <a:off x="9821745" y="1484784"/>
-            <a:ext cx="2195064" cy="1692803"/>
-          </a:xfrm>
-          <a:prstGeom prst="rect">
-            <a:avLst/>
-          </a:prstGeom>
-          <a:effectLst>
-            <a:outerShdw blurRad="50800" dist="38100" dir="2700000" algn="tl" rotWithShape="0">
-              <a:prstClr val="black">
-                <a:alpha val="40000"/>
-              </a:prstClr>
-            </a:outerShdw>
-          </a:effectLst>
-        </p:spPr>
-      </p:pic>
-    </p:spTree>
-    <p:extLst>
-      <p:ext uri="{BB962C8B-B14F-4D97-AF65-F5344CB8AC3E}">
-        <p14:creationId xmlns:p14="http://schemas.microsoft.com/office/powerpoint/2010/main" val="63474200"/>
-      </p:ext>
-    </p:extLst>
-  </p:cSld>
-  <p:clrMapOvr>
-    <a:masterClrMapping/>
-  </p:clrMapOvr>
-</p:sld>
-</file>
-
-<file path=ppt/slides/slide5.xml><?xml version="1.0" encoding="utf-8"?>
-<p:sld xmlns:a="http://schemas.openxmlformats.org/drawingml/2006/main" xmlns:r="http://schemas.openxmlformats.org/officeDocument/2006/relationships" xmlns:p="http://schemas.openxmlformats.org/presentationml/2006/main">
-  <p:cSld>
-    <p:spTree>
-      <p:nvGrpSpPr>
-        <p:cNvPr id="1" name="">
-          <a:extLst>
-            <a:ext uri="{FF2B5EF4-FFF2-40B4-BE49-F238E27FC236}">
-              <a16:creationId xmlns:a16="http://schemas.microsoft.com/office/drawing/2014/main" id="{2E2939C9-F02B-53AC-9919-4B60AEBC07E8}"/>
-            </a:ext>
-          </a:extLst>
-        </p:cNvPr>
-        <p:cNvGrpSpPr/>
-        <p:nvPr/>
-      </p:nvGrpSpPr>
-      <p:grpSpPr>
-        <a:xfrm>
-          <a:off x="0" y="0"/>
-          <a:ext cx="0" cy="0"/>
-          <a:chOff x="0" y="0"/>
-          <a:chExt cx="0" cy="0"/>
-        </a:xfrm>
-      </p:grpSpPr>
-      <p:sp>
-        <p:nvSpPr>
-          <p:cNvPr id="1048589" name="标题 4">
-            <a:extLst>
-              <a:ext uri="{FF2B5EF4-FFF2-40B4-BE49-F238E27FC236}">
-                <a16:creationId xmlns:a16="http://schemas.microsoft.com/office/drawing/2014/main" id="{2C88CEAC-39AA-AD98-6152-3AB69DBC25D1}"/>
-              </a:ext>
-            </a:extLst>
-          </p:cNvPr>
-          <p:cNvSpPr>
-            <a:spLocks noGrp="1"/>
-          </p:cNvSpPr>
-          <p:nvPr>
-            <p:ph type="title"/>
-          </p:nvPr>
-        </p:nvSpPr>
-        <p:spPr>
-          <a:xfrm>
-            <a:off x="191344" y="71541"/>
-            <a:ext cx="7884064" cy="835874"/>
-          </a:xfrm>
-        </p:spPr>
-        <p:txBody>
-          <a:bodyPr>
-            <a:noAutofit/>
-          </a:bodyPr>
-          <a:lstStyle/>
-          <a:p>
-            <a:r>
-              <a:rPr lang="en-US" altLang="zh-CN" sz="3200" dirty="0"/>
-              <a:t>Lambda Expression</a:t>
-            </a:r>
-            <a:endParaRPr lang="zh-CN" sz="3200" dirty="0"/>
-          </a:p>
-        </p:txBody>
-      </p:sp>
       <p:pic>
         <p:nvPicPr>
           <p:cNvPr id="18" name="图片 17">
@@ -7723,7 +5403,7 @@
 </p:sld>
 </file>
 
-<file path=ppt/slides/slide6.xml><?xml version="1.0" encoding="utf-8"?>
+<file path=ppt/slides/slide5.xml><?xml version="1.0" encoding="utf-8"?>
 <p:sld xmlns:a="http://schemas.openxmlformats.org/drawingml/2006/main" xmlns:r="http://schemas.openxmlformats.org/officeDocument/2006/relationships" xmlns:p="http://schemas.openxmlformats.org/presentationml/2006/main">
   <p:cSld>
     <p:spTree>
@@ -8339,7 +6019,7 @@
 </p:sld>
 </file>
 
-<file path=ppt/slides/slide7.xml><?xml version="1.0" encoding="utf-8"?>
+<file path=ppt/slides/slide6.xml><?xml version="1.0" encoding="utf-8"?>
 <p:sld xmlns:a="http://schemas.openxmlformats.org/drawingml/2006/main" xmlns:r="http://schemas.openxmlformats.org/officeDocument/2006/relationships" xmlns:p="http://schemas.openxmlformats.org/presentationml/2006/main">
   <p:cSld>
     <p:spTree>
@@ -9349,7 +7029,7 @@
 </p:sld>
 </file>
 
-<file path=ppt/slides/slide8.xml><?xml version="1.0" encoding="utf-8"?>
+<file path=ppt/slides/slide7.xml><?xml version="1.0" encoding="utf-8"?>
 <p:sld xmlns:a="http://schemas.openxmlformats.org/drawingml/2006/main" xmlns:r="http://schemas.openxmlformats.org/officeDocument/2006/relationships" xmlns:p="http://schemas.openxmlformats.org/presentationml/2006/main">
   <p:cSld>
     <p:spTree>
@@ -12576,7 +10256,7 @@
 </p:sld>
 </file>
 
-<file path=ppt/slides/slide9.xml><?xml version="1.0" encoding="utf-8"?>
+<file path=ppt/slides/slide8.xml><?xml version="1.0" encoding="utf-8"?>
 <p:sld xmlns:a="http://schemas.openxmlformats.org/drawingml/2006/main" xmlns:r="http://schemas.openxmlformats.org/officeDocument/2006/relationships" xmlns:p="http://schemas.openxmlformats.org/presentationml/2006/main">
   <p:cSld>
     <p:spTree>
@@ -15342,6 +13022,172 @@
 </p:sld>
 </file>
 
+<file path=ppt/slides/slide9.xml><?xml version="1.0" encoding="utf-8"?>
+<p:sld xmlns:a="http://schemas.openxmlformats.org/drawingml/2006/main" xmlns:r="http://schemas.openxmlformats.org/officeDocument/2006/relationships" xmlns:p="http://schemas.openxmlformats.org/presentationml/2006/main">
+  <p:cSld>
+    <p:spTree>
+      <p:nvGrpSpPr>
+        <p:cNvPr id="1" name=""/>
+        <p:cNvGrpSpPr/>
+        <p:nvPr/>
+      </p:nvGrpSpPr>
+      <p:grpSpPr>
+        <a:xfrm>
+          <a:off x="0" y="0"/>
+          <a:ext cx="0" cy="0"/>
+          <a:chOff x="0" y="0"/>
+          <a:chExt cx="0" cy="0"/>
+        </a:xfrm>
+      </p:grpSpPr>
+      <p:sp>
+        <p:nvSpPr>
+          <p:cNvPr id="1048583" name="Subtitle 14"/>
+          <p:cNvSpPr>
+            <a:spLocks noGrp="1"/>
+          </p:cNvSpPr>
+          <p:nvPr>
+            <p:ph idx="1"/>
+          </p:nvPr>
+        </p:nvSpPr>
+        <p:spPr/>
+        <p:txBody>
+          <a:bodyPr>
+            <a:normAutofit/>
+          </a:bodyPr>
+          <a:lstStyle/>
+          <a:p>
+            <a:r>
+              <a:rPr lang="zh-TW" sz="2800" b="1"/>
+              <a:t>林天麟 教授</a:t>
+            </a:r>
+            <a:endParaRPr lang="en-US" sz="2800" b="1"/>
+          </a:p>
+          <a:p>
+            <a:r>
+              <a:rPr lang="zh-CN"/>
+              <a:t>香港中文大学（深圳）</a:t>
+            </a:r>
+            <a:endParaRPr lang="en-US"/>
+          </a:p>
+          <a:p>
+            <a:r>
+              <a:rPr lang="zh-CN"/>
+              <a:t>机器人与</a:t>
+            </a:r>
+            <a:r>
+              <a:rPr lang="zh-TW"/>
+              <a:t>人工智能实验室</a:t>
+            </a:r>
+            <a:endParaRPr lang="en-US"/>
+          </a:p>
+          <a:p>
+            <a:r>
+              <a:rPr lang="en-US"/>
+              <a:t>WeChat: tinlunlam</a:t>
+            </a:r>
+            <a:endParaRPr lang="zh-CN"/>
+          </a:p>
+        </p:txBody>
+      </p:sp>
+      <p:sp>
+        <p:nvSpPr>
+          <p:cNvPr id="1048584" name="AutoShape 2"/>
+          <p:cNvSpPr>
+            <a:spLocks noChangeAspect="1" noChangeArrowheads="1"/>
+          </p:cNvSpPr>
+          <p:nvPr/>
+        </p:nvSpPr>
+        <p:spPr>
+          <a:xfrm>
+            <a:off x="155575" y="-144463"/>
+            <a:ext cx="304800" cy="304801"/>
+          </a:xfrm>
+          <a:prstGeom prst="rect">
+            <a:avLst/>
+          </a:prstGeom>
+          <a:noFill/>
+        </p:spPr>
+        <p:txBody>
+          <a:bodyPr vert="horz" wrap="square" lIns="91440" tIns="45720" rIns="91440" bIns="45720" numCol="1" anchor="t" anchorCtr="0"/>
+          <a:lstStyle/>
+          <a:p>
+            <a:endParaRPr lang="en-US"/>
+          </a:p>
+        </p:txBody>
+      </p:sp>
+      <p:pic>
+        <p:nvPicPr>
+          <p:cNvPr id="2097154" name="Picture 4"/>
+          <p:cNvPicPr>
+            <a:picLocks noChangeAspect="1" noChangeArrowheads="1"/>
+          </p:cNvPicPr>
+          <p:nvPr/>
+        </p:nvPicPr>
+        <p:blipFill>
+          <a:blip r:embed="rId2"/>
+          <a:stretch>
+            <a:fillRect/>
+          </a:stretch>
+        </p:blipFill>
+        <p:spPr>
+          <a:xfrm>
+            <a:off x="-1" y="0"/>
+            <a:ext cx="12344399" cy="6858000"/>
+          </a:xfrm>
+          <a:prstGeom prst="rect">
+            <a:avLst/>
+          </a:prstGeom>
+          <a:noFill/>
+        </p:spPr>
+      </p:pic>
+      <p:sp>
+        <p:nvSpPr>
+          <p:cNvPr id="1048585" name="Title 18"/>
+          <p:cNvSpPr>
+            <a:spLocks noGrp="1"/>
+          </p:cNvSpPr>
+          <p:nvPr>
+            <p:ph type="title"/>
+          </p:nvPr>
+        </p:nvSpPr>
+        <p:spPr>
+          <a:xfrm>
+            <a:off x="3552037" y="2894570"/>
+            <a:ext cx="5087926" cy="1783234"/>
+          </a:xfrm>
+        </p:spPr>
+        <p:txBody>
+          <a:bodyPr/>
+          <a:lstStyle/>
+          <a:p>
+            <a:pPr algn="ctr"/>
+            <a:r>
+              <a:rPr lang="en-US" sz="6000" dirty="0"/>
+              <a:t>T</a:t>
+            </a:r>
+            <a:r>
+              <a:rPr lang="en-US" sz="4800" dirty="0"/>
+              <a:t>HANK </a:t>
+            </a:r>
+            <a:r>
+              <a:rPr lang="en-US" sz="6000" dirty="0"/>
+              <a:t>Y</a:t>
+            </a:r>
+            <a:r>
+              <a:rPr lang="en-US" sz="4800" dirty="0"/>
+              <a:t>OU</a:t>
+            </a:r>
+          </a:p>
+        </p:txBody>
+      </p:sp>
+    </p:spTree>
+  </p:cSld>
+  <p:clrMapOvr>
+    <a:masterClrMapping/>
+  </p:clrMapOvr>
+</p:sld>
+</file>
+
 <file path=ppt/tags/tag1.xml><?xml version="1.0" encoding="utf-8"?>
 <p:tagLst xmlns:a="http://schemas.openxmlformats.org/drawingml/2006/main" xmlns:r="http://schemas.openxmlformats.org/officeDocument/2006/relationships" xmlns:p="http://schemas.openxmlformats.org/presentationml/2006/main">
   <p:tag name="KSO_WPP_MARK_KEY" val="1fe9a046-a2a9-43bc-a645-b850c7246860"/>
